--- a/答辩PPT-选择困难终结.pptx
+++ b/答辩PPT-选择困难终结.pptx
@@ -5,19 +5,20 @@
     <p:sldMasterId id="2147483648" r:id="rId1"/>
   </p:sldMasterIdLst>
   <p:sldIdLst>
-    <p:sldId id="256" r:id="rId7"/>
-    <p:sldId id="257" r:id="rId8"/>
-    <p:sldId id="258" r:id="rId9"/>
-    <p:sldId id="259" r:id="rId10"/>
-    <p:sldId id="260" r:id="rId11"/>
-    <p:sldId id="261" r:id="rId12"/>
-    <p:sldId id="262" r:id="rId13"/>
-    <p:sldId id="263" r:id="rId14"/>
-    <p:sldId id="264" r:id="rId15"/>
-    <p:sldId id="265" r:id="rId16"/>
-    <p:sldId id="266" r:id="rId17"/>
+    <p:sldId id="256" r:id="rId2"/>
+    <p:sldId id="257" r:id="rId3"/>
+    <p:sldId id="258" r:id="rId4"/>
+    <p:sldId id="259" r:id="rId5"/>
+    <p:sldId id="260" r:id="rId6"/>
+    <p:sldId id="261" r:id="rId7"/>
+    <p:sldId id="262" r:id="rId8"/>
+    <p:sldId id="263" r:id="rId9"/>
+    <p:sldId id="264" r:id="rId10"/>
+    <p:sldId id="265" r:id="rId11"/>
+    <p:sldId id="266" r:id="rId12"/>
+    <p:sldId id="267" r:id="rId13"/>
   </p:sldIdLst>
-  <p:sldSz cx="12191695" cy="6858000" type="screen4x3"/>
+  <p:sldSz cx="12192000" cy="6858000"/>
   <p:notesSz cx="6858000" cy="9144000"/>
   <p:defaultTextStyle>
     <a:defPPr>
@@ -114,6 +115,22 @@
       </a:defRPr>
     </a:lvl9pPr>
   </p:defaultTextStyle>
+  <p:extLst>
+    <p:ext uri="{EFAFB233-063F-42B5-8137-9DF3F51BA10A}">
+      <p15:sldGuideLst xmlns:p15="http://schemas.microsoft.com/office/powerpoint/2012/main">
+        <p15:guide id="1" orient="horz" pos="2160">
+          <p15:clr>
+            <a:srgbClr val="A4A3A4"/>
+          </p15:clr>
+        </p15:guide>
+        <p15:guide id="2" pos="2880">
+          <p15:clr>
+            <a:srgbClr val="A4A3A4"/>
+          </p15:clr>
+        </p15:guide>
+      </p15:sldGuideLst>
+    </p:ext>
+  </p:extLst>
 </p:presentation>
 </file>
 
@@ -155,10 +172,9 @@
           <a:lstStyle/>
           <a:p>
             <a:r>
-              <a:rPr lang="en-US" smtClean="0"/>
+              <a:rPr lang="en-US"/>
               <a:t>Click to edit Master title style</a:t>
             </a:r>
-            <a:endParaRPr lang="en-US"/>
           </a:p>
         </p:txBody>
       </p:sp>
@@ -274,10 +290,9 @@
           </a:lstStyle>
           <a:p>
             <a:r>
-              <a:rPr lang="en-US" smtClean="0"/>
+              <a:rPr lang="en-US"/>
               <a:t>Click to edit Master subtitle style</a:t>
             </a:r>
-            <a:endParaRPr lang="en-US"/>
           </a:p>
         </p:txBody>
       </p:sp>
@@ -298,7 +313,7 @@
           <a:p>
             <a:fld id="{5BCAD085-E8A6-8845-BD4E-CB4CCA059FC4}" type="datetimeFigureOut">
               <a:rPr lang="en-US" smtClean="0"/>
-              <a:t>1/27/13</a:t>
+              <a:t>6/10/2026</a:t>
             </a:fld>
             <a:endParaRPr lang="en-US"/>
           </a:p>
@@ -392,10 +407,9 @@
           <a:lstStyle/>
           <a:p>
             <a:r>
-              <a:rPr lang="en-US" smtClean="0"/>
+              <a:rPr lang="en-US"/>
               <a:t>Click to edit Master title style</a:t>
             </a:r>
-            <a:endParaRPr lang="en-US"/>
           </a:p>
         </p:txBody>
       </p:sp>
@@ -416,38 +430,37 @@
           <a:p>
             <a:pPr lvl="0"/>
             <a:r>
-              <a:rPr lang="en-US" smtClean="0"/>
+              <a:rPr lang="en-US"/>
               <a:t>Click to edit Master text styles</a:t>
             </a:r>
           </a:p>
           <a:p>
             <a:pPr lvl="1"/>
             <a:r>
-              <a:rPr lang="en-US" smtClean="0"/>
+              <a:rPr lang="en-US"/>
               <a:t>Second level</a:t>
             </a:r>
           </a:p>
           <a:p>
             <a:pPr lvl="2"/>
             <a:r>
-              <a:rPr lang="en-US" smtClean="0"/>
+              <a:rPr lang="en-US"/>
               <a:t>Third level</a:t>
             </a:r>
           </a:p>
           <a:p>
             <a:pPr lvl="3"/>
             <a:r>
-              <a:rPr lang="en-US" smtClean="0"/>
+              <a:rPr lang="en-US"/>
               <a:t>Fourth level</a:t>
             </a:r>
           </a:p>
           <a:p>
             <a:pPr lvl="4"/>
             <a:r>
-              <a:rPr lang="en-US" smtClean="0"/>
+              <a:rPr lang="en-US"/>
               <a:t>Fifth level</a:t>
             </a:r>
-            <a:endParaRPr lang="en-US"/>
           </a:p>
         </p:txBody>
       </p:sp>
@@ -468,7 +481,7 @@
           <a:p>
             <a:fld id="{5BCAD085-E8A6-8845-BD4E-CB4CCA059FC4}" type="datetimeFigureOut">
               <a:rPr lang="en-US" smtClean="0"/>
-              <a:t>1/27/13</a:t>
+              <a:t>6/10/2026</a:t>
             </a:fld>
             <a:endParaRPr lang="en-US"/>
           </a:p>
@@ -567,10 +580,9 @@
           <a:lstStyle/>
           <a:p>
             <a:r>
-              <a:rPr lang="en-US" smtClean="0"/>
+              <a:rPr lang="en-US"/>
               <a:t>Click to edit Master title style</a:t>
             </a:r>
-            <a:endParaRPr lang="en-US"/>
           </a:p>
         </p:txBody>
       </p:sp>
@@ -596,38 +608,37 @@
           <a:p>
             <a:pPr lvl="0"/>
             <a:r>
-              <a:rPr lang="en-US" smtClean="0"/>
+              <a:rPr lang="en-US"/>
               <a:t>Click to edit Master text styles</a:t>
             </a:r>
           </a:p>
           <a:p>
             <a:pPr lvl="1"/>
             <a:r>
-              <a:rPr lang="en-US" smtClean="0"/>
+              <a:rPr lang="en-US"/>
               <a:t>Second level</a:t>
             </a:r>
           </a:p>
           <a:p>
             <a:pPr lvl="2"/>
             <a:r>
-              <a:rPr lang="en-US" smtClean="0"/>
+              <a:rPr lang="en-US"/>
               <a:t>Third level</a:t>
             </a:r>
           </a:p>
           <a:p>
             <a:pPr lvl="3"/>
             <a:r>
-              <a:rPr lang="en-US" smtClean="0"/>
+              <a:rPr lang="en-US"/>
               <a:t>Fourth level</a:t>
             </a:r>
           </a:p>
           <a:p>
             <a:pPr lvl="4"/>
             <a:r>
-              <a:rPr lang="en-US" smtClean="0"/>
+              <a:rPr lang="en-US"/>
               <a:t>Fifth level</a:t>
             </a:r>
-            <a:endParaRPr lang="en-US"/>
           </a:p>
         </p:txBody>
       </p:sp>
@@ -648,7 +659,7 @@
           <a:p>
             <a:fld id="{5BCAD085-E8A6-8845-BD4E-CB4CCA059FC4}" type="datetimeFigureOut">
               <a:rPr lang="en-US" smtClean="0"/>
-              <a:t>1/27/13</a:t>
+              <a:t>6/10/2026</a:t>
             </a:fld>
             <a:endParaRPr lang="en-US"/>
           </a:p>
@@ -742,10 +753,9 @@
           <a:lstStyle/>
           <a:p>
             <a:r>
-              <a:rPr lang="en-US" smtClean="0"/>
+              <a:rPr lang="en-US"/>
               <a:t>Click to edit Master title style</a:t>
             </a:r>
-            <a:endParaRPr lang="en-US"/>
           </a:p>
         </p:txBody>
       </p:sp>
@@ -766,38 +776,37 @@
           <a:p>
             <a:pPr lvl="0"/>
             <a:r>
-              <a:rPr lang="en-US" smtClean="0"/>
+              <a:rPr lang="en-US"/>
               <a:t>Click to edit Master text styles</a:t>
             </a:r>
           </a:p>
           <a:p>
             <a:pPr lvl="1"/>
             <a:r>
-              <a:rPr lang="en-US" smtClean="0"/>
+              <a:rPr lang="en-US"/>
               <a:t>Second level</a:t>
             </a:r>
           </a:p>
           <a:p>
             <a:pPr lvl="2"/>
             <a:r>
-              <a:rPr lang="en-US" smtClean="0"/>
+              <a:rPr lang="en-US"/>
               <a:t>Third level</a:t>
             </a:r>
           </a:p>
           <a:p>
             <a:pPr lvl="3"/>
             <a:r>
-              <a:rPr lang="en-US" smtClean="0"/>
+              <a:rPr lang="en-US"/>
               <a:t>Fourth level</a:t>
             </a:r>
           </a:p>
           <a:p>
             <a:pPr lvl="4"/>
             <a:r>
-              <a:rPr lang="en-US" smtClean="0"/>
+              <a:rPr lang="en-US"/>
               <a:t>Fifth level</a:t>
             </a:r>
-            <a:endParaRPr lang="en-US"/>
           </a:p>
         </p:txBody>
       </p:sp>
@@ -818,7 +827,7 @@
           <a:p>
             <a:fld id="{5BCAD085-E8A6-8845-BD4E-CB4CCA059FC4}" type="datetimeFigureOut">
               <a:rPr lang="en-US" smtClean="0"/>
-              <a:t>1/27/13</a:t>
+              <a:t>6/10/2026</a:t>
             </a:fld>
             <a:endParaRPr lang="en-US"/>
           </a:p>
@@ -921,10 +930,9 @@
           </a:lstStyle>
           <a:p>
             <a:r>
-              <a:rPr lang="en-US" smtClean="0"/>
+              <a:rPr lang="en-US"/>
               <a:t>Click to edit Master title style</a:t>
             </a:r>
-            <a:endParaRPr lang="en-US"/>
           </a:p>
         </p:txBody>
       </p:sp>
@@ -1041,7 +1049,7 @@
           <a:p>
             <a:pPr lvl="0"/>
             <a:r>
-              <a:rPr lang="en-US" smtClean="0"/>
+              <a:rPr lang="en-US"/>
               <a:t>Click to edit Master text styles</a:t>
             </a:r>
           </a:p>
@@ -1064,7 +1072,7 @@
           <a:p>
             <a:fld id="{5BCAD085-E8A6-8845-BD4E-CB4CCA059FC4}" type="datetimeFigureOut">
               <a:rPr lang="en-US" smtClean="0"/>
-              <a:t>1/27/13</a:t>
+              <a:t>6/10/2026</a:t>
             </a:fld>
             <a:endParaRPr lang="en-US"/>
           </a:p>
@@ -1158,10 +1166,9 @@
           <a:lstStyle/>
           <a:p>
             <a:r>
-              <a:rPr lang="en-US" smtClean="0"/>
+              <a:rPr lang="en-US"/>
               <a:t>Click to edit Master title style</a:t>
             </a:r>
-            <a:endParaRPr lang="en-US"/>
           </a:p>
         </p:txBody>
       </p:sp>
@@ -1215,38 +1222,37 @@
           <a:p>
             <a:pPr lvl="0"/>
             <a:r>
-              <a:rPr lang="en-US" smtClean="0"/>
+              <a:rPr lang="en-US"/>
               <a:t>Click to edit Master text styles</a:t>
             </a:r>
           </a:p>
           <a:p>
             <a:pPr lvl="1"/>
             <a:r>
-              <a:rPr lang="en-US" smtClean="0"/>
+              <a:rPr lang="en-US"/>
               <a:t>Second level</a:t>
             </a:r>
           </a:p>
           <a:p>
             <a:pPr lvl="2"/>
             <a:r>
-              <a:rPr lang="en-US" smtClean="0"/>
+              <a:rPr lang="en-US"/>
               <a:t>Third level</a:t>
             </a:r>
           </a:p>
           <a:p>
             <a:pPr lvl="3"/>
             <a:r>
-              <a:rPr lang="en-US" smtClean="0"/>
+              <a:rPr lang="en-US"/>
               <a:t>Fourth level</a:t>
             </a:r>
           </a:p>
           <a:p>
             <a:pPr lvl="4"/>
             <a:r>
-              <a:rPr lang="en-US" smtClean="0"/>
+              <a:rPr lang="en-US"/>
               <a:t>Fifth level</a:t>
             </a:r>
-            <a:endParaRPr lang="en-US"/>
           </a:p>
         </p:txBody>
       </p:sp>
@@ -1300,38 +1306,37 @@
           <a:p>
             <a:pPr lvl="0"/>
             <a:r>
-              <a:rPr lang="en-US" smtClean="0"/>
+              <a:rPr lang="en-US"/>
               <a:t>Click to edit Master text styles</a:t>
             </a:r>
           </a:p>
           <a:p>
             <a:pPr lvl="1"/>
             <a:r>
-              <a:rPr lang="en-US" smtClean="0"/>
+              <a:rPr lang="en-US"/>
               <a:t>Second level</a:t>
             </a:r>
           </a:p>
           <a:p>
             <a:pPr lvl="2"/>
             <a:r>
-              <a:rPr lang="en-US" smtClean="0"/>
+              <a:rPr lang="en-US"/>
               <a:t>Third level</a:t>
             </a:r>
           </a:p>
           <a:p>
             <a:pPr lvl="3"/>
             <a:r>
-              <a:rPr lang="en-US" smtClean="0"/>
+              <a:rPr lang="en-US"/>
               <a:t>Fourth level</a:t>
             </a:r>
           </a:p>
           <a:p>
             <a:pPr lvl="4"/>
             <a:r>
-              <a:rPr lang="en-US" smtClean="0"/>
+              <a:rPr lang="en-US"/>
               <a:t>Fifth level</a:t>
             </a:r>
-            <a:endParaRPr lang="en-US"/>
           </a:p>
         </p:txBody>
       </p:sp>
@@ -1352,7 +1357,7 @@
           <a:p>
             <a:fld id="{5BCAD085-E8A6-8845-BD4E-CB4CCA059FC4}" type="datetimeFigureOut">
               <a:rPr lang="en-US" smtClean="0"/>
-              <a:t>1/27/13</a:t>
+              <a:t>6/10/2026</a:t>
             </a:fld>
             <a:endParaRPr lang="en-US"/>
           </a:p>
@@ -1450,10 +1455,9 @@
           </a:lstStyle>
           <a:p>
             <a:r>
-              <a:rPr lang="en-US" smtClean="0"/>
+              <a:rPr lang="en-US"/>
               <a:t>Click to edit Master title style</a:t>
             </a:r>
-            <a:endParaRPr lang="en-US"/>
           </a:p>
         </p:txBody>
       </p:sp>
@@ -1516,7 +1520,7 @@
           <a:p>
             <a:pPr lvl="0"/>
             <a:r>
-              <a:rPr lang="en-US" smtClean="0"/>
+              <a:rPr lang="en-US"/>
               <a:t>Click to edit Master text styles</a:t>
             </a:r>
           </a:p>
@@ -1572,38 +1576,37 @@
           <a:p>
             <a:pPr lvl="0"/>
             <a:r>
-              <a:rPr lang="en-US" smtClean="0"/>
+              <a:rPr lang="en-US"/>
               <a:t>Click to edit Master text styles</a:t>
             </a:r>
           </a:p>
           <a:p>
             <a:pPr lvl="1"/>
             <a:r>
-              <a:rPr lang="en-US" smtClean="0"/>
+              <a:rPr lang="en-US"/>
               <a:t>Second level</a:t>
             </a:r>
           </a:p>
           <a:p>
             <a:pPr lvl="2"/>
             <a:r>
-              <a:rPr lang="en-US" smtClean="0"/>
+              <a:rPr lang="en-US"/>
               <a:t>Third level</a:t>
             </a:r>
           </a:p>
           <a:p>
             <a:pPr lvl="3"/>
             <a:r>
-              <a:rPr lang="en-US" smtClean="0"/>
+              <a:rPr lang="en-US"/>
               <a:t>Fourth level</a:t>
             </a:r>
           </a:p>
           <a:p>
             <a:pPr lvl="4"/>
             <a:r>
-              <a:rPr lang="en-US" smtClean="0"/>
+              <a:rPr lang="en-US"/>
               <a:t>Fifth level</a:t>
             </a:r>
-            <a:endParaRPr lang="en-US"/>
           </a:p>
         </p:txBody>
       </p:sp>
@@ -1666,7 +1669,7 @@
           <a:p>
             <a:pPr lvl="0"/>
             <a:r>
-              <a:rPr lang="en-US" smtClean="0"/>
+              <a:rPr lang="en-US"/>
               <a:t>Click to edit Master text styles</a:t>
             </a:r>
           </a:p>
@@ -1722,38 +1725,37 @@
           <a:p>
             <a:pPr lvl="0"/>
             <a:r>
-              <a:rPr lang="en-US" smtClean="0"/>
+              <a:rPr lang="en-US"/>
               <a:t>Click to edit Master text styles</a:t>
             </a:r>
           </a:p>
           <a:p>
             <a:pPr lvl="1"/>
             <a:r>
-              <a:rPr lang="en-US" smtClean="0"/>
+              <a:rPr lang="en-US"/>
               <a:t>Second level</a:t>
             </a:r>
           </a:p>
           <a:p>
             <a:pPr lvl="2"/>
             <a:r>
-              <a:rPr lang="en-US" smtClean="0"/>
+              <a:rPr lang="en-US"/>
               <a:t>Third level</a:t>
             </a:r>
           </a:p>
           <a:p>
             <a:pPr lvl="3"/>
             <a:r>
-              <a:rPr lang="en-US" smtClean="0"/>
+              <a:rPr lang="en-US"/>
               <a:t>Fourth level</a:t>
             </a:r>
           </a:p>
           <a:p>
             <a:pPr lvl="4"/>
             <a:r>
-              <a:rPr lang="en-US" smtClean="0"/>
+              <a:rPr lang="en-US"/>
               <a:t>Fifth level</a:t>
             </a:r>
-            <a:endParaRPr lang="en-US"/>
           </a:p>
         </p:txBody>
       </p:sp>
@@ -1774,7 +1776,7 @@
           <a:p>
             <a:fld id="{5BCAD085-E8A6-8845-BD4E-CB4CCA059FC4}" type="datetimeFigureOut">
               <a:rPr lang="en-US" smtClean="0"/>
-              <a:t>1/27/13</a:t>
+              <a:t>6/10/2026</a:t>
             </a:fld>
             <a:endParaRPr lang="en-US"/>
           </a:p>
@@ -1868,10 +1870,9 @@
           <a:lstStyle/>
           <a:p>
             <a:r>
-              <a:rPr lang="en-US" smtClean="0"/>
+              <a:rPr lang="en-US"/>
               <a:t>Click to edit Master title style</a:t>
             </a:r>
-            <a:endParaRPr lang="en-US"/>
           </a:p>
         </p:txBody>
       </p:sp>
@@ -1892,7 +1893,7 @@
           <a:p>
             <a:fld id="{5BCAD085-E8A6-8845-BD4E-CB4CCA059FC4}" type="datetimeFigureOut">
               <a:rPr lang="en-US" smtClean="0"/>
-              <a:t>1/27/13</a:t>
+              <a:t>6/10/2026</a:t>
             </a:fld>
             <a:endParaRPr lang="en-US"/>
           </a:p>
@@ -1987,7 +1988,7 @@
           <a:p>
             <a:fld id="{5BCAD085-E8A6-8845-BD4E-CB4CCA059FC4}" type="datetimeFigureOut">
               <a:rPr lang="en-US" smtClean="0"/>
-              <a:t>1/27/13</a:t>
+              <a:t>6/10/2026</a:t>
             </a:fld>
             <a:endParaRPr lang="en-US"/>
           </a:p>
@@ -2090,10 +2091,9 @@
           </a:lstStyle>
           <a:p>
             <a:r>
-              <a:rPr lang="en-US" smtClean="0"/>
+              <a:rPr lang="en-US"/>
               <a:t>Click to edit Master title style</a:t>
             </a:r>
-            <a:endParaRPr lang="en-US"/>
           </a:p>
         </p:txBody>
       </p:sp>
@@ -2147,38 +2147,37 @@
           <a:p>
             <a:pPr lvl="0"/>
             <a:r>
-              <a:rPr lang="en-US" smtClean="0"/>
+              <a:rPr lang="en-US"/>
               <a:t>Click to edit Master text styles</a:t>
             </a:r>
           </a:p>
           <a:p>
             <a:pPr lvl="1"/>
             <a:r>
-              <a:rPr lang="en-US" smtClean="0"/>
+              <a:rPr lang="en-US"/>
               <a:t>Second level</a:t>
             </a:r>
           </a:p>
           <a:p>
             <a:pPr lvl="2"/>
             <a:r>
-              <a:rPr lang="en-US" smtClean="0"/>
+              <a:rPr lang="en-US"/>
               <a:t>Third level</a:t>
             </a:r>
           </a:p>
           <a:p>
             <a:pPr lvl="3"/>
             <a:r>
-              <a:rPr lang="en-US" smtClean="0"/>
+              <a:rPr lang="en-US"/>
               <a:t>Fourth level</a:t>
             </a:r>
           </a:p>
           <a:p>
             <a:pPr lvl="4"/>
             <a:r>
-              <a:rPr lang="en-US" smtClean="0"/>
+              <a:rPr lang="en-US"/>
               <a:t>Fifth level</a:t>
             </a:r>
-            <a:endParaRPr lang="en-US"/>
           </a:p>
         </p:txBody>
       </p:sp>
@@ -2241,7 +2240,7 @@
           <a:p>
             <a:pPr lvl="0"/>
             <a:r>
-              <a:rPr lang="en-US" smtClean="0"/>
+              <a:rPr lang="en-US"/>
               <a:t>Click to edit Master text styles</a:t>
             </a:r>
           </a:p>
@@ -2264,7 +2263,7 @@
           <a:p>
             <a:fld id="{5BCAD085-E8A6-8845-BD4E-CB4CCA059FC4}" type="datetimeFigureOut">
               <a:rPr lang="en-US" smtClean="0"/>
-              <a:t>1/27/13</a:t>
+              <a:t>6/10/2026</a:t>
             </a:fld>
             <a:endParaRPr lang="en-US"/>
           </a:p>
@@ -2367,10 +2366,9 @@
           </a:lstStyle>
           <a:p>
             <a:r>
-              <a:rPr lang="en-US" smtClean="0"/>
+              <a:rPr lang="en-US"/>
               <a:t>Click to edit Master title style</a:t>
             </a:r>
-            <a:endParaRPr lang="en-US"/>
           </a:p>
         </p:txBody>
       </p:sp>
@@ -2494,7 +2492,7 @@
           <a:p>
             <a:pPr lvl="0"/>
             <a:r>
-              <a:rPr lang="en-US" smtClean="0"/>
+              <a:rPr lang="en-US"/>
               <a:t>Click to edit Master text styles</a:t>
             </a:r>
           </a:p>
@@ -2517,7 +2515,7 @@
           <a:p>
             <a:fld id="{5BCAD085-E8A6-8845-BD4E-CB4CCA059FC4}" type="datetimeFigureOut">
               <a:rPr lang="en-US" smtClean="0"/>
-              <a:t>1/27/13</a:t>
+              <a:t>6/10/2026</a:t>
             </a:fld>
             <a:endParaRPr lang="en-US"/>
           </a:p>
@@ -2626,10 +2624,9 @@
           <a:lstStyle/>
           <a:p>
             <a:r>
-              <a:rPr lang="en-US" smtClean="0"/>
+              <a:rPr lang="en-US"/>
               <a:t>Click to edit Master title style</a:t>
             </a:r>
-            <a:endParaRPr lang="en-US"/>
           </a:p>
         </p:txBody>
       </p:sp>
@@ -2660,38 +2657,37 @@
           <a:p>
             <a:pPr lvl="0"/>
             <a:r>
-              <a:rPr lang="en-US" smtClean="0"/>
+              <a:rPr lang="en-US"/>
               <a:t>Click to edit Master text styles</a:t>
             </a:r>
           </a:p>
           <a:p>
             <a:pPr lvl="1"/>
             <a:r>
-              <a:rPr lang="en-US" smtClean="0"/>
+              <a:rPr lang="en-US"/>
               <a:t>Second level</a:t>
             </a:r>
           </a:p>
           <a:p>
             <a:pPr lvl="2"/>
             <a:r>
-              <a:rPr lang="en-US" smtClean="0"/>
+              <a:rPr lang="en-US"/>
               <a:t>Third level</a:t>
             </a:r>
           </a:p>
           <a:p>
             <a:pPr lvl="3"/>
             <a:r>
-              <a:rPr lang="en-US" smtClean="0"/>
+              <a:rPr lang="en-US"/>
               <a:t>Fourth level</a:t>
             </a:r>
           </a:p>
           <a:p>
             <a:pPr lvl="4"/>
             <a:r>
-              <a:rPr lang="en-US" smtClean="0"/>
+              <a:rPr lang="en-US"/>
               <a:t>Fifth level</a:t>
             </a:r>
-            <a:endParaRPr lang="en-US"/>
           </a:p>
         </p:txBody>
       </p:sp>
@@ -2730,7 +2726,7 @@
           <a:p>
             <a:fld id="{5BCAD085-E8A6-8845-BD4E-CB4CCA059FC4}" type="datetimeFigureOut">
               <a:rPr lang="en-US" smtClean="0"/>
-              <a:t>1/27/13</a:t>
+              <a:t>6/10/2026</a:t>
             </a:fld>
             <a:endParaRPr lang="en-US"/>
           </a:p>
@@ -3089,7 +3085,7 @@
 </file>
 
 <file path=ppt/slides/slide1.xml><?xml version="1.0" encoding="utf-8"?>
-<p:sld xmlns:a="http://schemas.openxmlformats.org/drawingml/2006/main" xmlns:p="http://schemas.openxmlformats.org/presentationml/2006/main" xmlns:r="http://schemas.openxmlformats.org/officeDocument/2006/relationships">
+<p:sld xmlns:a="http://schemas.openxmlformats.org/drawingml/2006/main" xmlns:r="http://schemas.openxmlformats.org/officeDocument/2006/relationships" xmlns:p="http://schemas.openxmlformats.org/presentationml/2006/main">
   <p:cSld>
     <p:bg>
       <p:bgPr>
@@ -3105,7 +3101,14 @@
         <p:cNvGrpSpPr/>
         <p:nvPr/>
       </p:nvGrpSpPr>
-      <p:grpSpPr/>
+      <p:grpSpPr>
+        <a:xfrm>
+          <a:off x="0" y="0"/>
+          <a:ext cx="0" cy="0"/>
+          <a:chOff x="0" y="0"/>
+          <a:chExt cx="0" cy="0"/>
+        </a:xfrm>
+      </p:grpSpPr>
       <p:sp>
         <p:nvSpPr>
           <p:cNvPr id="2" name="Rectangle 1"/>
@@ -3146,6 +3149,7 @@
           <a:lstStyle/>
           <a:p>
             <a:pPr algn="ctr"/>
+            <a:endParaRPr/>
           </a:p>
         </p:txBody>
       </p:sp>
@@ -3227,6 +3231,7 @@
           <a:lstStyle/>
           <a:p>
             <a:pPr algn="ctr"/>
+            <a:endParaRPr/>
           </a:p>
         </p:txBody>
       </p:sp>
@@ -3347,7 +3352,7 @@
         <p:spPr>
           <a:xfrm>
             <a:off x="914400" y="5760720"/>
-            <a:ext cx="10332720" cy="457200"/>
+            <a:ext cx="10332720" cy="307777"/>
           </a:xfrm>
           <a:prstGeom prst="rect">
             <a:avLst/>
@@ -3369,7 +3374,141 @@
               </a:defRPr>
             </a:pPr>
             <a:r>
-              <a:t>组员：______  ______  ______  |  讲师：李承浩  |  2026-06</a:t>
+              <a:rPr dirty="0" err="1"/>
+              <a:t>组员</a:t>
+            </a:r>
+            <a:r>
+              <a:rPr dirty="0"/>
+              <a:t>：</a:t>
+            </a:r>
+            <a:r>
+              <a:rPr lang="zh-CN" altLang="en-US" sz="1400" dirty="0">
+                <a:solidFill>
+                  <a:srgbClr val="3A3A3A"/>
+                </a:solidFill>
+                <a:latin typeface="微软雅黑" panose="020B0503020204020204" pitchFamily="34" charset="-122"/>
+                <a:ea typeface="微软雅黑" panose="020B0503020204020204" pitchFamily="34" charset="-122"/>
+              </a:rPr>
+              <a:t>董一霏</a:t>
+            </a:r>
+            <a:r>
+              <a:rPr sz="1400" dirty="0">
+                <a:solidFill>
+                  <a:srgbClr val="3A3A3A"/>
+                </a:solidFill>
+                <a:latin typeface="微软雅黑" panose="020B0503020204020204" pitchFamily="34" charset="-122"/>
+                <a:ea typeface="微软雅黑" panose="020B0503020204020204" pitchFamily="34" charset="-122"/>
+              </a:rPr>
+              <a:t>  </a:t>
+            </a:r>
+            <a:r>
+              <a:rPr lang="zh-CN" altLang="en-US" sz="1400" dirty="0">
+                <a:solidFill>
+                  <a:srgbClr val="3A3A3A"/>
+                </a:solidFill>
+                <a:latin typeface="微软雅黑" panose="020B0503020204020204" pitchFamily="34" charset="-122"/>
+                <a:ea typeface="微软雅黑" panose="020B0503020204020204" pitchFamily="34" charset="-122"/>
+              </a:rPr>
+              <a:t>王佳慧</a:t>
+            </a:r>
+            <a:r>
+              <a:rPr sz="1400" dirty="0">
+                <a:solidFill>
+                  <a:srgbClr val="3A3A3A"/>
+                </a:solidFill>
+                <a:latin typeface="微软雅黑" panose="020B0503020204020204" pitchFamily="34" charset="-122"/>
+                <a:ea typeface="微软雅黑" panose="020B0503020204020204" pitchFamily="34" charset="-122"/>
+              </a:rPr>
+              <a:t>  </a:t>
+            </a:r>
+            <a:r>
+              <a:rPr lang="zh-CN" altLang="en-US" sz="1400" dirty="0">
+                <a:solidFill>
+                  <a:srgbClr val="3A3A3A"/>
+                </a:solidFill>
+                <a:latin typeface="微软雅黑" panose="020B0503020204020204" pitchFamily="34" charset="-122"/>
+                <a:ea typeface="微软雅黑" panose="020B0503020204020204" pitchFamily="34" charset="-122"/>
+              </a:rPr>
+              <a:t>陶曼曼</a:t>
+            </a:r>
+            <a:r>
+              <a:rPr sz="1400" dirty="0">
+                <a:solidFill>
+                  <a:srgbClr val="3A3A3A"/>
+                </a:solidFill>
+                <a:latin typeface="Microsoft YaHei"/>
+              </a:rPr>
+              <a:t>  |  </a:t>
+            </a:r>
+            <a:r>
+              <a:rPr sz="1400" dirty="0" err="1">
+                <a:solidFill>
+                  <a:srgbClr val="3A3A3A"/>
+                </a:solidFill>
+                <a:latin typeface="Microsoft YaHei"/>
+              </a:rPr>
+              <a:t>讲师：</a:t>
+            </a:r>
+            <a:r>
+              <a:rPr sz="1400" dirty="0" err="1">
+                <a:solidFill>
+                  <a:srgbClr val="3A3A3A"/>
+                </a:solidFill>
+                <a:latin typeface="微软雅黑" panose="020B0503020204020204" pitchFamily="34" charset="-122"/>
+                <a:ea typeface="微软雅黑" panose="020B0503020204020204" pitchFamily="34" charset="-122"/>
+              </a:rPr>
+              <a:t>李承浩</a:t>
+            </a:r>
+            <a:r>
+              <a:rPr lang="en-US" sz="1400" dirty="0">
+                <a:solidFill>
+                  <a:srgbClr val="3A3A3A"/>
+                </a:solidFill>
+                <a:latin typeface="微软雅黑" panose="020B0503020204020204" pitchFamily="34" charset="-122"/>
+                <a:ea typeface="微软雅黑" panose="020B0503020204020204" pitchFamily="34" charset="-122"/>
+              </a:rPr>
+              <a:t> </a:t>
+            </a:r>
+            <a:r>
+              <a:rPr lang="zh-CN" altLang="en-US" sz="1400" dirty="0">
+                <a:solidFill>
+                  <a:srgbClr val="3A3A3A"/>
+                </a:solidFill>
+                <a:latin typeface="微软雅黑" panose="020B0503020204020204" pitchFamily="34" charset="-122"/>
+                <a:ea typeface="微软雅黑" panose="020B0503020204020204" pitchFamily="34" charset="-122"/>
+              </a:rPr>
+              <a:t>洪潇</a:t>
+            </a:r>
+            <a:r>
+              <a:rPr lang="en-US" sz="1400" dirty="0">
+                <a:solidFill>
+                  <a:srgbClr val="3A3A3A"/>
+                </a:solidFill>
+                <a:latin typeface="微软雅黑" panose="020B0503020204020204" pitchFamily="34" charset="-122"/>
+                <a:ea typeface="微软雅黑" panose="020B0503020204020204" pitchFamily="34" charset="-122"/>
+              </a:rPr>
+              <a:t> </a:t>
+            </a:r>
+            <a:r>
+              <a:rPr sz="1400" dirty="0">
+                <a:solidFill>
+                  <a:srgbClr val="3A3A3A"/>
+                </a:solidFill>
+                <a:latin typeface="微软雅黑" panose="020B0503020204020204" pitchFamily="34" charset="-122"/>
+                <a:ea typeface="微软雅黑" panose="020B0503020204020204" pitchFamily="34" charset="-122"/>
+              </a:rPr>
+              <a:t> </a:t>
+            </a:r>
+            <a:r>
+              <a:rPr dirty="0">
+                <a:latin typeface="微软雅黑" panose="020B0503020204020204" pitchFamily="34" charset="-122"/>
+                <a:ea typeface="微软雅黑" panose="020B0503020204020204" pitchFamily="34" charset="-122"/>
+              </a:rPr>
+              <a:t> </a:t>
+            </a:r>
+            <a:r>
+              <a:rPr dirty="0"/>
+              <a:t>|  2026-06</a:t>
             </a:r>
           </a:p>
         </p:txBody>
@@ -3414,6 +3553,7 @@
           <a:lstStyle/>
           <a:p>
             <a:pPr algn="ctr"/>
+            <a:endParaRPr/>
           </a:p>
         </p:txBody>
       </p:sp>
@@ -3458,11 +3598,23 @@
   <p:clrMapOvr>
     <a:masterClrMapping/>
   </p:clrMapOvr>
+  <mc:AlternateContent xmlns:mc="http://schemas.openxmlformats.org/markup-compatibility/2006">
+    <mc:Choice xmlns:p159="http://schemas.microsoft.com/office/powerpoint/2015/09/main" Requires="p159">
+      <p:transition xmlns:p14="http://schemas.microsoft.com/office/powerpoint/2010/main" spd="slow" p14:dur="2000">
+        <p159:morph option="byObject"/>
+      </p:transition>
+    </mc:Choice>
+    <mc:Fallback>
+      <p:transition spd="slow">
+        <p:fade/>
+      </p:transition>
+    </mc:Fallback>
+  </mc:AlternateContent>
 </p:sld>
 </file>
 
 <file path=ppt/slides/slide10.xml><?xml version="1.0" encoding="utf-8"?>
-<p:sld xmlns:a="http://schemas.openxmlformats.org/drawingml/2006/main" xmlns:p="http://schemas.openxmlformats.org/presentationml/2006/main" xmlns:r="http://schemas.openxmlformats.org/officeDocument/2006/relationships">
+<p:sld xmlns:a="http://schemas.openxmlformats.org/drawingml/2006/main" xmlns:r="http://schemas.openxmlformats.org/officeDocument/2006/relationships" xmlns:p="http://schemas.openxmlformats.org/presentationml/2006/main">
   <p:cSld>
     <p:bg>
       <p:bgPr>
@@ -3478,7 +3630,14 @@
         <p:cNvGrpSpPr/>
         <p:nvPr/>
       </p:nvGrpSpPr>
-      <p:grpSpPr/>
+      <p:grpSpPr>
+        <a:xfrm>
+          <a:off x="0" y="0"/>
+          <a:ext cx="0" cy="0"/>
+          <a:chOff x="0" y="0"/>
+          <a:chExt cx="0" cy="0"/>
+        </a:xfrm>
+      </p:grpSpPr>
       <p:sp>
         <p:nvSpPr>
           <p:cNvPr id="2" name="Rectangle 1"/>
@@ -3521,6 +3680,7 @@
           <a:lstStyle/>
           <a:p>
             <a:pPr algn="ctr"/>
+            <a:endParaRPr/>
           </a:p>
         </p:txBody>
       </p:sp>
@@ -3638,6 +3798,7 @@
           <a:lstStyle/>
           <a:p>
             <a:pPr algn="ctr"/>
+            <a:endParaRPr/>
           </a:p>
         </p:txBody>
       </p:sp>
@@ -3822,6 +3983,7 @@
           <a:lstStyle/>
           <a:p>
             <a:pPr algn="ctr"/>
+            <a:endParaRPr/>
           </a:p>
         </p:txBody>
       </p:sp>
@@ -4006,6 +4168,7 @@
           <a:lstStyle/>
           <a:p>
             <a:pPr algn="ctr"/>
+            <a:endParaRPr/>
           </a:p>
         </p:txBody>
       </p:sp>
@@ -4053,7 +4216,7 @@
         </p:nvSpPr>
         <p:spPr>
           <a:xfrm>
-            <a:off x="822960" y="4709160"/>
+            <a:off x="822960" y="4603489"/>
             <a:ext cx="10515600" cy="1463040"/>
           </a:xfrm>
           <a:prstGeom prst="rect">
@@ -4079,7 +4242,12 @@
               </a:defRPr>
             </a:pPr>
             <a:r>
-              <a:t>评级：A 档</a:t>
+              <a:rPr dirty="0" err="1"/>
+              <a:t>评级：A</a:t>
+            </a:r>
+            <a:r>
+              <a:rPr dirty="0"/>
+              <a:t> 档</a:t>
             </a:r>
           </a:p>
           <a:p>
@@ -4094,6 +4262,7 @@
                 <a:latin typeface="Microsoft YaHei"/>
               </a:defRPr>
             </a:pPr>
+            <a:endParaRPr dirty="0"/>
           </a:p>
           <a:p>
             <a:pPr>
@@ -4108,7 +4277,12 @@
               </a:defRPr>
             </a:pPr>
             <a:r>
-              <a:t>理由：</a:t>
+              <a:rPr dirty="0" err="1"/>
+              <a:t>理由</a:t>
+            </a:r>
+            <a:r>
+              <a:rPr dirty="0"/>
+              <a:t>：</a:t>
             </a:r>
           </a:p>
           <a:p>
@@ -4124,8 +4298,22 @@
               </a:defRPr>
             </a:pPr>
             <a:r>
-              <a:t>• 系统完整可用：6页面SPA + 14个API端点 + 云端部署 + 公网可访问</a:t>
-            </a:r>
+              <a:rPr dirty="0"/>
+              <a:t>• 系统完整可用：6页面SPA + 14个API端点 + </a:t>
+            </a:r>
+            <a:r>
+              <a:rPr dirty="0" err="1"/>
+              <a:t>云端部署</a:t>
+            </a:r>
+            <a:r>
+              <a:rPr dirty="0"/>
+              <a:t> + </a:t>
+            </a:r>
+            <a:r>
+              <a:rPr dirty="0" err="1"/>
+              <a:t>公网可访问</a:t>
+            </a:r>
+            <a:endParaRPr dirty="0"/>
           </a:p>
           <a:p>
             <a:pPr>
@@ -4140,7 +4328,40 @@
               </a:defRPr>
             </a:pPr>
             <a:r>
-              <a:t>• 遵循Vibe Coding三步要求：逻辑先行(5份规划文档)→渐进式(12步逐层构建)→责任归属(7个AI错误被找出并修复)</a:t>
+              <a:rPr dirty="0"/>
+              <a:t>• </a:t>
+            </a:r>
+            <a:r>
+              <a:rPr dirty="0" err="1"/>
+              <a:t>遵循Vibe</a:t>
+            </a:r>
+            <a:r>
+              <a:rPr dirty="0"/>
+              <a:t> </a:t>
+            </a:r>
+            <a:r>
+              <a:rPr dirty="0" err="1"/>
+              <a:t>Coding三步要求：逻辑先行</a:t>
+            </a:r>
+            <a:r>
+              <a:rPr dirty="0"/>
+              <a:t>(5份规划文档)→</a:t>
+            </a:r>
+            <a:r>
+              <a:rPr dirty="0" err="1"/>
+              <a:t>渐进式</a:t>
+            </a:r>
+            <a:r>
+              <a:rPr dirty="0"/>
+              <a:t>(12步逐层构建)→</a:t>
+            </a:r>
+            <a:r>
+              <a:rPr dirty="0" err="1"/>
+              <a:t>责任归属</a:t>
+            </a:r>
+            <a:r>
+              <a:rPr dirty="0"/>
+              <a:t>(7个AI错误被找出并修复)</a:t>
             </a:r>
           </a:p>
           <a:p>
@@ -4156,7 +4377,32 @@
               </a:defRPr>
             </a:pPr>
             <a:r>
-              <a:t>• 有详细的Prompt记录(第6页)和AI纠错案例(第7页)，小组分工明确(第4页)</a:t>
+              <a:rPr dirty="0"/>
+              <a:t>• </a:t>
+            </a:r>
+            <a:r>
+              <a:rPr dirty="0" err="1"/>
+              <a:t>有详细的Prompt记录</a:t>
+            </a:r>
+            <a:r>
+              <a:rPr dirty="0"/>
+              <a:t>(第6页)</a:t>
+            </a:r>
+            <a:r>
+              <a:rPr dirty="0" err="1"/>
+              <a:t>和AI纠错案例</a:t>
+            </a:r>
+            <a:r>
+              <a:rPr dirty="0"/>
+              <a:t>(第7页)，</a:t>
+            </a:r>
+            <a:r>
+              <a:rPr dirty="0" err="1"/>
+              <a:t>小组分工明确</a:t>
+            </a:r>
+            <a:r>
+              <a:rPr dirty="0"/>
+              <a:t>(第4页)</a:t>
             </a:r>
           </a:p>
         </p:txBody>
@@ -4202,11 +4448,23 @@
   <p:clrMapOvr>
     <a:masterClrMapping/>
   </p:clrMapOvr>
+  <mc:AlternateContent xmlns:mc="http://schemas.openxmlformats.org/markup-compatibility/2006">
+    <mc:Choice xmlns:p159="http://schemas.microsoft.com/office/powerpoint/2015/09/main" Requires="p159">
+      <p:transition xmlns:p14="http://schemas.microsoft.com/office/powerpoint/2010/main" spd="slow" p14:dur="2000">
+        <p159:morph option="byObject"/>
+      </p:transition>
+    </mc:Choice>
+    <mc:Fallback>
+      <p:transition spd="slow">
+        <p:fade/>
+      </p:transition>
+    </mc:Fallback>
+  </mc:AlternateContent>
 </p:sld>
 </file>
 
 <file path=ppt/slides/slide11.xml><?xml version="1.0" encoding="utf-8"?>
-<p:sld xmlns:a="http://schemas.openxmlformats.org/drawingml/2006/main" xmlns:p="http://schemas.openxmlformats.org/presentationml/2006/main" xmlns:r="http://schemas.openxmlformats.org/officeDocument/2006/relationships">
+<p:sld xmlns:a="http://schemas.openxmlformats.org/drawingml/2006/main" xmlns:r="http://schemas.openxmlformats.org/officeDocument/2006/relationships" xmlns:p="http://schemas.openxmlformats.org/presentationml/2006/main">
   <p:cSld>
     <p:bg>
       <p:bgPr>
@@ -4222,7 +4480,14 @@
         <p:cNvGrpSpPr/>
         <p:nvPr/>
       </p:nvGrpSpPr>
-      <p:grpSpPr/>
+      <p:grpSpPr>
+        <a:xfrm>
+          <a:off x="0" y="0"/>
+          <a:ext cx="0" cy="0"/>
+          <a:chOff x="0" y="0"/>
+          <a:chExt cx="0" cy="0"/>
+        </a:xfrm>
+      </p:grpSpPr>
       <p:sp>
         <p:nvSpPr>
           <p:cNvPr id="2" name="Rectangle 1"/>
@@ -4265,6 +4530,7 @@
           <a:lstStyle/>
           <a:p>
             <a:pPr algn="ctr"/>
+            <a:endParaRPr/>
           </a:p>
         </p:txBody>
       </p:sp>
@@ -4300,42 +4566,6 @@
             </a:pPr>
             <a:r>
               <a:t>答辩分工</a:t>
-            </a:r>
-          </a:p>
-        </p:txBody>
-      </p:sp>
-      <p:sp>
-        <p:nvSpPr>
-          <p:cNvPr id="4" name="TextBox 3"/>
-          <p:cNvSpPr txBox="1"/>
-          <p:nvPr/>
-        </p:nvSpPr>
-        <p:spPr>
-          <a:xfrm>
-            <a:off x="731520" y="658368"/>
-            <a:ext cx="10058400" cy="320040"/>
-          </a:xfrm>
-          <a:prstGeom prst="rect">
-            <a:avLst/>
-          </a:prstGeom>
-          <a:noFill/>
-        </p:spPr>
-        <p:txBody>
-          <a:bodyPr wrap="square">
-            <a:spAutoFit/>
-          </a:bodyPr>
-          <a:lstStyle/>
-          <a:p>
-            <a:pPr algn="l">
-              <a:defRPr sz="1300" b="0">
-                <a:solidFill>
-                  <a:srgbClr val="7A7A7A"/>
-                </a:solidFill>
-                <a:latin typeface="Microsoft YaHei"/>
-              </a:defRPr>
-            </a:pPr>
-            <a:r>
-              <a:t>每人承担一个环节 · 合计 5-8 分钟</a:t>
             </a:r>
           </a:p>
         </p:txBody>
@@ -4382,6 +4612,7 @@
           <a:lstStyle/>
           <a:p>
             <a:pPr algn="ctr"/>
+            <a:endParaRPr/>
           </a:p>
         </p:txBody>
       </p:sp>
@@ -4440,11 +4671,41 @@
                 <a:tableStyleId>{5C22544A-7EE6-4342-B048-85BDC9FD1C3A}</a:tableStyleId>
               </a:tblPr>
               <a:tblGrid>
-                <a:gridCol w="1645920"/>
-                <a:gridCol w="1097280"/>
-                <a:gridCol w="914400"/>
-                <a:gridCol w="4572000"/>
-                <a:gridCol w="914400"/>
+                <a:gridCol w="1645920">
+                  <a:extLst>
+                    <a:ext uri="{9D8B030D-6E8A-4147-A177-3AD203B41FA5}">
+                      <a16:colId xmlns:a16="http://schemas.microsoft.com/office/drawing/2014/main" val="20000"/>
+                    </a:ext>
+                  </a:extLst>
+                </a:gridCol>
+                <a:gridCol w="1097280">
+                  <a:extLst>
+                    <a:ext uri="{9D8B030D-6E8A-4147-A177-3AD203B41FA5}">
+                      <a16:colId xmlns:a16="http://schemas.microsoft.com/office/drawing/2014/main" val="20001"/>
+                    </a:ext>
+                  </a:extLst>
+                </a:gridCol>
+                <a:gridCol w="914400">
+                  <a:extLst>
+                    <a:ext uri="{9D8B030D-6E8A-4147-A177-3AD203B41FA5}">
+                      <a16:colId xmlns:a16="http://schemas.microsoft.com/office/drawing/2014/main" val="20002"/>
+                    </a:ext>
+                  </a:extLst>
+                </a:gridCol>
+                <a:gridCol w="4572000">
+                  <a:extLst>
+                    <a:ext uri="{9D8B030D-6E8A-4147-A177-3AD203B41FA5}">
+                      <a16:colId xmlns:a16="http://schemas.microsoft.com/office/drawing/2014/main" val="20003"/>
+                    </a:ext>
+                  </a:extLst>
+                </a:gridCol>
+                <a:gridCol w="914400">
+                  <a:extLst>
+                    <a:ext uri="{9D8B030D-6E8A-4147-A177-3AD203B41FA5}">
+                      <a16:colId xmlns:a16="http://schemas.microsoft.com/office/drawing/2014/main" val="20004"/>
+                    </a:ext>
+                  </a:extLst>
+                </a:gridCol>
               </a:tblGrid>
               <a:tr h="335280">
                 <a:tc>
@@ -4567,6 +4828,11 @@
                     </a:solidFill>
                   </a:tcPr>
                 </a:tc>
+                <a:extLst>
+                  <a:ext uri="{0D108BD9-81ED-4DB2-BD59-A6C34878D82A}">
+                    <a16:rowId xmlns:a16="http://schemas.microsoft.com/office/drawing/2014/main" val="10000"/>
+                  </a:ext>
+                </a:extLst>
               </a:tr>
               <a:tr h="335280">
                 <a:tc>
@@ -4689,6 +4955,11 @@
                     </a:solidFill>
                   </a:tcPr>
                 </a:tc>
+                <a:extLst>
+                  <a:ext uri="{0D108BD9-81ED-4DB2-BD59-A6C34878D82A}">
+                    <a16:rowId xmlns:a16="http://schemas.microsoft.com/office/drawing/2014/main" val="10001"/>
+                  </a:ext>
+                </a:extLst>
               </a:tr>
               <a:tr h="335280">
                 <a:tc>
@@ -4811,6 +5082,11 @@
                     </a:solidFill>
                   </a:tcPr>
                 </a:tc>
+                <a:extLst>
+                  <a:ext uri="{0D108BD9-81ED-4DB2-BD59-A6C34878D82A}">
+                    <a16:rowId xmlns:a16="http://schemas.microsoft.com/office/drawing/2014/main" val="10002"/>
+                  </a:ext>
+                </a:extLst>
               </a:tr>
               <a:tr h="335280">
                 <a:tc>
@@ -4933,6 +5209,11 @@
                     </a:solidFill>
                   </a:tcPr>
                 </a:tc>
+                <a:extLst>
+                  <a:ext uri="{0D108BD9-81ED-4DB2-BD59-A6C34878D82A}">
+                    <a16:rowId xmlns:a16="http://schemas.microsoft.com/office/drawing/2014/main" val="10003"/>
+                  </a:ext>
+                </a:extLst>
               </a:tr>
               <a:tr h="335280">
                 <a:tc>
@@ -5055,6 +5336,11 @@
                     </a:solidFill>
                   </a:tcPr>
                 </a:tc>
+                <a:extLst>
+                  <a:ext uri="{0D108BD9-81ED-4DB2-BD59-A6C34878D82A}">
+                    <a16:rowId xmlns:a16="http://schemas.microsoft.com/office/drawing/2014/main" val="10004"/>
+                  </a:ext>
+                </a:extLst>
               </a:tr>
               <a:tr h="335280">
                 <a:tc>
@@ -5177,6 +5463,11 @@
                     </a:solidFill>
                   </a:tcPr>
                 </a:tc>
+                <a:extLst>
+                  <a:ext uri="{0D108BD9-81ED-4DB2-BD59-A6C34878D82A}">
+                    <a16:rowId xmlns:a16="http://schemas.microsoft.com/office/drawing/2014/main" val="10005"/>
+                  </a:ext>
+                </a:extLst>
               </a:tr>
             </a:tbl>
           </a:graphicData>
@@ -5224,6 +5515,7 @@
           <a:lstStyle/>
           <a:p>
             <a:pPr algn="ctr"/>
+            <a:endParaRPr/>
           </a:p>
         </p:txBody>
       </p:sp>
@@ -5282,12 +5574,48 @@
                 <a:tableStyleId>{5C22544A-7EE6-4342-B048-85BDC9FD1C3A}</a:tableStyleId>
               </a:tblPr>
               <a:tblGrid>
-                <a:gridCol w="1371600"/>
-                <a:gridCol w="1645920"/>
-                <a:gridCol w="1371600"/>
-                <a:gridCol w="1645920"/>
-                <a:gridCol w="1371600"/>
-                <a:gridCol w="1828800"/>
+                <a:gridCol w="1371600">
+                  <a:extLst>
+                    <a:ext uri="{9D8B030D-6E8A-4147-A177-3AD203B41FA5}">
+                      <a16:colId xmlns:a16="http://schemas.microsoft.com/office/drawing/2014/main" val="20000"/>
+                    </a:ext>
+                  </a:extLst>
+                </a:gridCol>
+                <a:gridCol w="1645920">
+                  <a:extLst>
+                    <a:ext uri="{9D8B030D-6E8A-4147-A177-3AD203B41FA5}">
+                      <a16:colId xmlns:a16="http://schemas.microsoft.com/office/drawing/2014/main" val="20001"/>
+                    </a:ext>
+                  </a:extLst>
+                </a:gridCol>
+                <a:gridCol w="1371600">
+                  <a:extLst>
+                    <a:ext uri="{9D8B030D-6E8A-4147-A177-3AD203B41FA5}">
+                      <a16:colId xmlns:a16="http://schemas.microsoft.com/office/drawing/2014/main" val="20002"/>
+                    </a:ext>
+                  </a:extLst>
+                </a:gridCol>
+                <a:gridCol w="1645920">
+                  <a:extLst>
+                    <a:ext uri="{9D8B030D-6E8A-4147-A177-3AD203B41FA5}">
+                      <a16:colId xmlns:a16="http://schemas.microsoft.com/office/drawing/2014/main" val="20003"/>
+                    </a:ext>
+                  </a:extLst>
+                </a:gridCol>
+                <a:gridCol w="1371600">
+                  <a:extLst>
+                    <a:ext uri="{9D8B030D-6E8A-4147-A177-3AD203B41FA5}">
+                      <a16:colId xmlns:a16="http://schemas.microsoft.com/office/drawing/2014/main" val="20004"/>
+                    </a:ext>
+                  </a:extLst>
+                </a:gridCol>
+                <a:gridCol w="1828800">
+                  <a:extLst>
+                    <a:ext uri="{9D8B030D-6E8A-4147-A177-3AD203B41FA5}">
+                      <a16:colId xmlns:a16="http://schemas.microsoft.com/office/drawing/2014/main" val="20005"/>
+                    </a:ext>
+                  </a:extLst>
+                </a:gridCol>
               </a:tblGrid>
               <a:tr h="342900">
                 <a:tc>
@@ -5434,6 +5762,11 @@
                     </a:solidFill>
                   </a:tcPr>
                 </a:tc>
+                <a:extLst>
+                  <a:ext uri="{0D108BD9-81ED-4DB2-BD59-A6C34878D82A}">
+                    <a16:rowId xmlns:a16="http://schemas.microsoft.com/office/drawing/2014/main" val="10000"/>
+                  </a:ext>
+                </a:extLst>
               </a:tr>
               <a:tr h="342900">
                 <a:tc>
@@ -5580,6 +5913,11 @@
                     </a:solidFill>
                   </a:tcPr>
                 </a:tc>
+                <a:extLst>
+                  <a:ext uri="{0D108BD9-81ED-4DB2-BD59-A6C34878D82A}">
+                    <a16:rowId xmlns:a16="http://schemas.microsoft.com/office/drawing/2014/main" val="10001"/>
+                  </a:ext>
+                </a:extLst>
               </a:tr>
               <a:tr h="342900">
                 <a:tc>
@@ -5726,6 +6064,11 @@
                     </a:solidFill>
                   </a:tcPr>
                 </a:tc>
+                <a:extLst>
+                  <a:ext uri="{0D108BD9-81ED-4DB2-BD59-A6C34878D82A}">
+                    <a16:rowId xmlns:a16="http://schemas.microsoft.com/office/drawing/2014/main" val="10002"/>
+                  </a:ext>
+                </a:extLst>
               </a:tr>
               <a:tr h="342900">
                 <a:tc>
@@ -5872,6 +6215,11 @@
                     </a:solidFill>
                   </a:tcPr>
                 </a:tc>
+                <a:extLst>
+                  <a:ext uri="{0D108BD9-81ED-4DB2-BD59-A6C34878D82A}">
+                    <a16:rowId xmlns:a16="http://schemas.microsoft.com/office/drawing/2014/main" val="10003"/>
+                  </a:ext>
+                </a:extLst>
               </a:tr>
             </a:tbl>
           </a:graphicData>
@@ -5918,11 +6266,579 @@
   <p:clrMapOvr>
     <a:masterClrMapping/>
   </p:clrMapOvr>
+  <mc:AlternateContent xmlns:mc="http://schemas.openxmlformats.org/markup-compatibility/2006">
+    <mc:Choice xmlns:p159="http://schemas.microsoft.com/office/powerpoint/2015/09/main" Requires="p159">
+      <p:transition xmlns:p14="http://schemas.microsoft.com/office/powerpoint/2010/main" spd="slow" p14:dur="2000">
+        <p159:morph option="byObject"/>
+      </p:transition>
+    </mc:Choice>
+    <mc:Fallback>
+      <p:transition spd="slow">
+        <p:fade/>
+      </p:transition>
+    </mc:Fallback>
+  </mc:AlternateContent>
+</p:sld>
+</file>
+
+<file path=ppt/slides/slide12.xml><?xml version="1.0" encoding="utf-8"?>
+<p:sld xmlns:a="http://schemas.openxmlformats.org/drawingml/2006/main" xmlns:r="http://schemas.openxmlformats.org/officeDocument/2006/relationships" xmlns:p="http://schemas.openxmlformats.org/presentationml/2006/main">
+  <p:cSld>
+    <p:spTree>
+      <p:nvGrpSpPr>
+        <p:cNvPr id="1" name="">
+          <a:extLst>
+            <a:ext uri="{FF2B5EF4-FFF2-40B4-BE49-F238E27FC236}">
+              <a16:creationId xmlns:a16="http://schemas.microsoft.com/office/drawing/2014/main" id="{7B9DCF78-FB22-091F-38FF-03214B076D5E}"/>
+            </a:ext>
+          </a:extLst>
+        </p:cNvPr>
+        <p:cNvGrpSpPr/>
+        <p:nvPr/>
+      </p:nvGrpSpPr>
+      <p:grpSpPr>
+        <a:xfrm>
+          <a:off x="0" y="0"/>
+          <a:ext cx="0" cy="0"/>
+          <a:chOff x="0" y="0"/>
+          <a:chExt cx="0" cy="0"/>
+        </a:xfrm>
+      </p:grpSpPr>
+      <p:sp>
+        <p:nvSpPr>
+          <p:cNvPr id="2" name="Rectangle 1">
+            <a:extLst>
+              <a:ext uri="{FF2B5EF4-FFF2-40B4-BE49-F238E27FC236}">
+                <a16:creationId xmlns:a16="http://schemas.microsoft.com/office/drawing/2014/main" id="{FBEF4F5B-E6C6-BF28-2EB7-B48D07F5068B}"/>
+              </a:ext>
+            </a:extLst>
+          </p:cNvPr>
+          <p:cNvSpPr/>
+          <p:nvPr/>
+        </p:nvSpPr>
+        <p:spPr>
+          <a:xfrm>
+            <a:off x="0" y="0"/>
+            <a:ext cx="12191695" cy="137160"/>
+          </a:xfrm>
+          <a:prstGeom prst="rect">
+            <a:avLst/>
+          </a:prstGeom>
+          <a:solidFill>
+            <a:srgbClr val="1A1A1A"/>
+          </a:solidFill>
+          <a:ln>
+            <a:noFill/>
+          </a:ln>
+        </p:spPr>
+        <p:style>
+          <a:lnRef idx="1">
+            <a:schemeClr val="accent1"/>
+          </a:lnRef>
+          <a:fillRef idx="3">
+            <a:schemeClr val="accent1"/>
+          </a:fillRef>
+          <a:effectRef idx="2">
+            <a:schemeClr val="accent1"/>
+          </a:effectRef>
+          <a:fontRef idx="minor">
+            <a:schemeClr val="lt1"/>
+          </a:fontRef>
+        </p:style>
+        <p:txBody>
+          <a:bodyPr rtlCol="0" anchor="ctr"/>
+          <a:lstStyle/>
+          <a:p>
+            <a:pPr algn="ctr"/>
+            <a:endParaRPr/>
+          </a:p>
+        </p:txBody>
+      </p:sp>
+      <p:sp>
+        <p:nvSpPr>
+          <p:cNvPr id="4" name="Rounded Rectangle 3">
+            <a:extLst>
+              <a:ext uri="{FF2B5EF4-FFF2-40B4-BE49-F238E27FC236}">
+                <a16:creationId xmlns:a16="http://schemas.microsoft.com/office/drawing/2014/main" id="{E73C2EB1-B28B-C01A-5A8B-612C5C3AD3B7}"/>
+              </a:ext>
+            </a:extLst>
+          </p:cNvPr>
+          <p:cNvSpPr/>
+          <p:nvPr/>
+        </p:nvSpPr>
+        <p:spPr>
+          <a:xfrm>
+            <a:off x="2184077" y="1526104"/>
+            <a:ext cx="7711828" cy="2196890"/>
+          </a:xfrm>
+          <a:prstGeom prst="roundRect">
+            <a:avLst/>
+          </a:prstGeom>
+          <a:solidFill>
+            <a:srgbClr val="FFEDB3"/>
+          </a:solidFill>
+          <a:ln w="38100">
+            <a:solidFill>
+              <a:srgbClr val="1A1A1A"/>
+            </a:solidFill>
+          </a:ln>
+        </p:spPr>
+        <p:style>
+          <a:lnRef idx="1">
+            <a:schemeClr val="accent1"/>
+          </a:lnRef>
+          <a:fillRef idx="3">
+            <a:schemeClr val="accent1"/>
+          </a:fillRef>
+          <a:effectRef idx="2">
+            <a:schemeClr val="accent1"/>
+          </a:effectRef>
+          <a:fontRef idx="minor">
+            <a:schemeClr val="lt1"/>
+          </a:fontRef>
+        </p:style>
+        <p:txBody>
+          <a:bodyPr rtlCol="0" anchor="ctr"/>
+          <a:lstStyle/>
+          <a:p>
+            <a:pPr algn="ctr"/>
+            <a:endParaRPr/>
+          </a:p>
+        </p:txBody>
+      </p:sp>
+      <p:sp>
+        <p:nvSpPr>
+          <p:cNvPr id="5" name="TextBox 4">
+            <a:extLst>
+              <a:ext uri="{FF2B5EF4-FFF2-40B4-BE49-F238E27FC236}">
+                <a16:creationId xmlns:a16="http://schemas.microsoft.com/office/drawing/2014/main" id="{F939A1E8-E6EC-2989-0FCA-5F04F13B67EB}"/>
+              </a:ext>
+            </a:extLst>
+          </p:cNvPr>
+          <p:cNvSpPr txBox="1"/>
+          <p:nvPr/>
+        </p:nvSpPr>
+        <p:spPr>
+          <a:xfrm>
+            <a:off x="3066096" y="2116717"/>
+            <a:ext cx="6059501" cy="1015663"/>
+          </a:xfrm>
+          <a:prstGeom prst="rect">
+            <a:avLst/>
+          </a:prstGeom>
+          <a:noFill/>
+        </p:spPr>
+        <p:txBody>
+          <a:bodyPr wrap="square">
+            <a:spAutoFit/>
+          </a:bodyPr>
+          <a:lstStyle/>
+          <a:p>
+            <a:pPr algn="ctr">
+              <a:defRPr sz="2200" b="1">
+                <a:solidFill>
+                  <a:srgbClr val="1A1A1A"/>
+                </a:solidFill>
+                <a:latin typeface="Microsoft YaHei"/>
+              </a:defRPr>
+            </a:pPr>
+            <a:r>
+              <a:rPr lang="en-US" sz="6000" dirty="0"/>
+              <a:t>THANK YOU !</a:t>
+            </a:r>
+            <a:endParaRPr sz="6000" dirty="0"/>
+          </a:p>
+        </p:txBody>
+      </p:sp>
+      <p:sp>
+        <p:nvSpPr>
+          <p:cNvPr id="6" name="TextBox 5">
+            <a:extLst>
+              <a:ext uri="{FF2B5EF4-FFF2-40B4-BE49-F238E27FC236}">
+                <a16:creationId xmlns:a16="http://schemas.microsoft.com/office/drawing/2014/main" id="{340536D1-DAD8-EC69-821E-327FE50B3574}"/>
+              </a:ext>
+            </a:extLst>
+          </p:cNvPr>
+          <p:cNvSpPr txBox="1"/>
+          <p:nvPr/>
+        </p:nvSpPr>
+        <p:spPr>
+          <a:xfrm>
+            <a:off x="931525" y="4248790"/>
+            <a:ext cx="10332720" cy="307777"/>
+          </a:xfrm>
+          <a:prstGeom prst="rect">
+            <a:avLst/>
+          </a:prstGeom>
+          <a:noFill/>
+        </p:spPr>
+        <p:txBody>
+          <a:bodyPr wrap="square">
+            <a:spAutoFit/>
+          </a:bodyPr>
+          <a:lstStyle/>
+          <a:p>
+            <a:pPr algn="ctr">
+              <a:defRPr sz="1400" b="0">
+                <a:solidFill>
+                  <a:srgbClr val="7A7A7A"/>
+                </a:solidFill>
+                <a:latin typeface="Microsoft YaHei"/>
+              </a:defRPr>
+            </a:pPr>
+            <a:r>
+              <a:rPr dirty="0"/>
+              <a:t>Python </a:t>
+            </a:r>
+            <a:r>
+              <a:rPr dirty="0" err="1"/>
+              <a:t>程序设计课程大作业</a:t>
+            </a:r>
+            <a:r>
+              <a:rPr dirty="0"/>
+              <a:t>  </a:t>
+            </a:r>
+          </a:p>
+        </p:txBody>
+      </p:sp>
+      <p:sp>
+        <p:nvSpPr>
+          <p:cNvPr id="7" name="TextBox 6">
+            <a:extLst>
+              <a:ext uri="{FF2B5EF4-FFF2-40B4-BE49-F238E27FC236}">
+                <a16:creationId xmlns:a16="http://schemas.microsoft.com/office/drawing/2014/main" id="{CE2B368B-0B07-CE0F-D4A0-642BD67C372E}"/>
+              </a:ext>
+            </a:extLst>
+          </p:cNvPr>
+          <p:cNvSpPr txBox="1"/>
+          <p:nvPr/>
+        </p:nvSpPr>
+        <p:spPr>
+          <a:xfrm>
+            <a:off x="929487" y="4696897"/>
+            <a:ext cx="10332720" cy="457200"/>
+          </a:xfrm>
+          <a:prstGeom prst="rect">
+            <a:avLst/>
+          </a:prstGeom>
+          <a:noFill/>
+        </p:spPr>
+        <p:txBody>
+          <a:bodyPr wrap="square">
+            <a:spAutoFit/>
+          </a:bodyPr>
+          <a:lstStyle/>
+          <a:p>
+            <a:pPr algn="ctr">
+              <a:defRPr sz="1200" b="0">
+                <a:solidFill>
+                  <a:srgbClr val="7A7A7A"/>
+                </a:solidFill>
+                <a:latin typeface="Microsoft YaHei"/>
+              </a:defRPr>
+            </a:pPr>
+            <a:r>
+              <a:rPr dirty="0"/>
+              <a:t>线上：dariaaaa.pythonanywhere.com  |  GitHub：dongyifei0502/choice-terminator</a:t>
+            </a:r>
+          </a:p>
+        </p:txBody>
+      </p:sp>
+      <p:sp>
+        <p:nvSpPr>
+          <p:cNvPr id="8" name="TextBox 7">
+            <a:extLst>
+              <a:ext uri="{FF2B5EF4-FFF2-40B4-BE49-F238E27FC236}">
+                <a16:creationId xmlns:a16="http://schemas.microsoft.com/office/drawing/2014/main" id="{E2B87A2C-1E02-3271-EF92-A1123B2A7B1C}"/>
+              </a:ext>
+            </a:extLst>
+          </p:cNvPr>
+          <p:cNvSpPr txBox="1"/>
+          <p:nvPr/>
+        </p:nvSpPr>
+        <p:spPr>
+          <a:xfrm>
+            <a:off x="914400" y="5760720"/>
+            <a:ext cx="10332720" cy="307777"/>
+          </a:xfrm>
+          <a:prstGeom prst="rect">
+            <a:avLst/>
+          </a:prstGeom>
+          <a:noFill/>
+        </p:spPr>
+        <p:txBody>
+          <a:bodyPr wrap="square">
+            <a:spAutoFit/>
+          </a:bodyPr>
+          <a:lstStyle/>
+          <a:p>
+            <a:pPr algn="ctr">
+              <a:defRPr sz="1400" b="0">
+                <a:solidFill>
+                  <a:srgbClr val="3A3A3A"/>
+                </a:solidFill>
+                <a:latin typeface="Microsoft YaHei"/>
+              </a:defRPr>
+            </a:pPr>
+            <a:r>
+              <a:rPr dirty="0" err="1"/>
+              <a:t>组员</a:t>
+            </a:r>
+            <a:r>
+              <a:rPr dirty="0"/>
+              <a:t>：</a:t>
+            </a:r>
+            <a:r>
+              <a:rPr lang="zh-CN" altLang="en-US" sz="1400" dirty="0">
+                <a:solidFill>
+                  <a:srgbClr val="3A3A3A"/>
+                </a:solidFill>
+                <a:latin typeface="微软雅黑" panose="020B0503020204020204" pitchFamily="34" charset="-122"/>
+                <a:ea typeface="微软雅黑" panose="020B0503020204020204" pitchFamily="34" charset="-122"/>
+              </a:rPr>
+              <a:t>董一霏</a:t>
+            </a:r>
+            <a:r>
+              <a:rPr sz="1400" dirty="0">
+                <a:solidFill>
+                  <a:srgbClr val="3A3A3A"/>
+                </a:solidFill>
+                <a:latin typeface="微软雅黑" panose="020B0503020204020204" pitchFamily="34" charset="-122"/>
+                <a:ea typeface="微软雅黑" panose="020B0503020204020204" pitchFamily="34" charset="-122"/>
+              </a:rPr>
+              <a:t>  </a:t>
+            </a:r>
+            <a:r>
+              <a:rPr lang="zh-CN" altLang="en-US" sz="1400" dirty="0">
+                <a:solidFill>
+                  <a:srgbClr val="3A3A3A"/>
+                </a:solidFill>
+                <a:latin typeface="微软雅黑" panose="020B0503020204020204" pitchFamily="34" charset="-122"/>
+                <a:ea typeface="微软雅黑" panose="020B0503020204020204" pitchFamily="34" charset="-122"/>
+              </a:rPr>
+              <a:t>王佳慧</a:t>
+            </a:r>
+            <a:r>
+              <a:rPr sz="1400" dirty="0">
+                <a:solidFill>
+                  <a:srgbClr val="3A3A3A"/>
+                </a:solidFill>
+                <a:latin typeface="微软雅黑" panose="020B0503020204020204" pitchFamily="34" charset="-122"/>
+                <a:ea typeface="微软雅黑" panose="020B0503020204020204" pitchFamily="34" charset="-122"/>
+              </a:rPr>
+              <a:t>  </a:t>
+            </a:r>
+            <a:r>
+              <a:rPr lang="zh-CN" altLang="en-US" sz="1400" dirty="0">
+                <a:solidFill>
+                  <a:srgbClr val="3A3A3A"/>
+                </a:solidFill>
+                <a:latin typeface="微软雅黑" panose="020B0503020204020204" pitchFamily="34" charset="-122"/>
+                <a:ea typeface="微软雅黑" panose="020B0503020204020204" pitchFamily="34" charset="-122"/>
+              </a:rPr>
+              <a:t>陶曼曼</a:t>
+            </a:r>
+            <a:r>
+              <a:rPr sz="1400" dirty="0">
+                <a:solidFill>
+                  <a:srgbClr val="3A3A3A"/>
+                </a:solidFill>
+                <a:latin typeface="Microsoft YaHei"/>
+              </a:rPr>
+              <a:t>  |  </a:t>
+            </a:r>
+            <a:r>
+              <a:rPr sz="1400" dirty="0" err="1">
+                <a:solidFill>
+                  <a:srgbClr val="3A3A3A"/>
+                </a:solidFill>
+                <a:latin typeface="Microsoft YaHei"/>
+              </a:rPr>
+              <a:t>讲师：</a:t>
+            </a:r>
+            <a:r>
+              <a:rPr sz="1400" dirty="0" err="1">
+                <a:solidFill>
+                  <a:srgbClr val="3A3A3A"/>
+                </a:solidFill>
+                <a:latin typeface="微软雅黑" panose="020B0503020204020204" pitchFamily="34" charset="-122"/>
+                <a:ea typeface="微软雅黑" panose="020B0503020204020204" pitchFamily="34" charset="-122"/>
+              </a:rPr>
+              <a:t>李承浩</a:t>
+            </a:r>
+            <a:r>
+              <a:rPr lang="en-US" sz="1400" dirty="0">
+                <a:solidFill>
+                  <a:srgbClr val="3A3A3A"/>
+                </a:solidFill>
+                <a:latin typeface="微软雅黑" panose="020B0503020204020204" pitchFamily="34" charset="-122"/>
+                <a:ea typeface="微软雅黑" panose="020B0503020204020204" pitchFamily="34" charset="-122"/>
+              </a:rPr>
+              <a:t> </a:t>
+            </a:r>
+            <a:r>
+              <a:rPr lang="zh-CN" altLang="en-US" sz="1400" dirty="0">
+                <a:solidFill>
+                  <a:srgbClr val="3A3A3A"/>
+                </a:solidFill>
+                <a:latin typeface="微软雅黑" panose="020B0503020204020204" pitchFamily="34" charset="-122"/>
+                <a:ea typeface="微软雅黑" panose="020B0503020204020204" pitchFamily="34" charset="-122"/>
+              </a:rPr>
+              <a:t>洪潇</a:t>
+            </a:r>
+            <a:r>
+              <a:rPr lang="en-US" sz="1400" dirty="0">
+                <a:solidFill>
+                  <a:srgbClr val="3A3A3A"/>
+                </a:solidFill>
+                <a:latin typeface="微软雅黑" panose="020B0503020204020204" pitchFamily="34" charset="-122"/>
+                <a:ea typeface="微软雅黑" panose="020B0503020204020204" pitchFamily="34" charset="-122"/>
+              </a:rPr>
+              <a:t> </a:t>
+            </a:r>
+            <a:r>
+              <a:rPr sz="1400" dirty="0">
+                <a:solidFill>
+                  <a:srgbClr val="3A3A3A"/>
+                </a:solidFill>
+                <a:latin typeface="微软雅黑" panose="020B0503020204020204" pitchFamily="34" charset="-122"/>
+                <a:ea typeface="微软雅黑" panose="020B0503020204020204" pitchFamily="34" charset="-122"/>
+              </a:rPr>
+              <a:t> </a:t>
+            </a:r>
+            <a:r>
+              <a:rPr dirty="0">
+                <a:latin typeface="微软雅黑" panose="020B0503020204020204" pitchFamily="34" charset="-122"/>
+                <a:ea typeface="微软雅黑" panose="020B0503020204020204" pitchFamily="34" charset="-122"/>
+              </a:rPr>
+              <a:t> </a:t>
+            </a:r>
+            <a:r>
+              <a:rPr dirty="0"/>
+              <a:t>|  2026-06</a:t>
+            </a:r>
+          </a:p>
+        </p:txBody>
+      </p:sp>
+      <p:sp>
+        <p:nvSpPr>
+          <p:cNvPr id="9" name="Rectangle 8">
+            <a:extLst>
+              <a:ext uri="{FF2B5EF4-FFF2-40B4-BE49-F238E27FC236}">
+                <a16:creationId xmlns:a16="http://schemas.microsoft.com/office/drawing/2014/main" id="{B1720C37-44F5-3971-0742-D948004C585F}"/>
+              </a:ext>
+            </a:extLst>
+          </p:cNvPr>
+          <p:cNvSpPr/>
+          <p:nvPr/>
+        </p:nvSpPr>
+        <p:spPr>
+          <a:xfrm>
+            <a:off x="0" y="6720840"/>
+            <a:ext cx="12191695" cy="137160"/>
+          </a:xfrm>
+          <a:prstGeom prst="rect">
+            <a:avLst/>
+          </a:prstGeom>
+          <a:solidFill>
+            <a:srgbClr val="1A1A1A"/>
+          </a:solidFill>
+          <a:ln>
+            <a:noFill/>
+          </a:ln>
+        </p:spPr>
+        <p:style>
+          <a:lnRef idx="1">
+            <a:schemeClr val="accent1"/>
+          </a:lnRef>
+          <a:fillRef idx="3">
+            <a:schemeClr val="accent1"/>
+          </a:fillRef>
+          <a:effectRef idx="2">
+            <a:schemeClr val="accent1"/>
+          </a:effectRef>
+          <a:fontRef idx="minor">
+            <a:schemeClr val="lt1"/>
+          </a:fontRef>
+        </p:style>
+        <p:txBody>
+          <a:bodyPr rtlCol="0" anchor="ctr"/>
+          <a:lstStyle/>
+          <a:p>
+            <a:pPr algn="ctr"/>
+            <a:endParaRPr/>
+          </a:p>
+        </p:txBody>
+      </p:sp>
+      <p:sp>
+        <p:nvSpPr>
+          <p:cNvPr id="10" name="TextBox 9">
+            <a:extLst>
+              <a:ext uri="{FF2B5EF4-FFF2-40B4-BE49-F238E27FC236}">
+                <a16:creationId xmlns:a16="http://schemas.microsoft.com/office/drawing/2014/main" id="{C37BEE3E-E5F1-EA52-EC54-4824C1364357}"/>
+              </a:ext>
+            </a:extLst>
+          </p:cNvPr>
+          <p:cNvSpPr txBox="1"/>
+          <p:nvPr/>
+        </p:nvSpPr>
+        <p:spPr>
+          <a:xfrm>
+            <a:off x="11155680" y="6446520"/>
+            <a:ext cx="914400" cy="320040"/>
+          </a:xfrm>
+          <a:prstGeom prst="rect">
+            <a:avLst/>
+          </a:prstGeom>
+          <a:noFill/>
+        </p:spPr>
+        <p:txBody>
+          <a:bodyPr wrap="square">
+            <a:spAutoFit/>
+          </a:bodyPr>
+          <a:lstStyle/>
+          <a:p>
+            <a:pPr algn="r">
+              <a:defRPr sz="1200" b="0">
+                <a:solidFill>
+                  <a:srgbClr val="7A7A7A"/>
+                </a:solidFill>
+                <a:latin typeface="Microsoft YaHei"/>
+              </a:defRPr>
+            </a:pPr>
+            <a:r>
+              <a:t>1</a:t>
+            </a:r>
+          </a:p>
+        </p:txBody>
+      </p:sp>
+    </p:spTree>
+    <p:extLst>
+      <p:ext uri="{BB962C8B-B14F-4D97-AF65-F5344CB8AC3E}">
+        <p14:creationId xmlns:p14="http://schemas.microsoft.com/office/powerpoint/2010/main" val="4239681244"/>
+      </p:ext>
+    </p:extLst>
+  </p:cSld>
+  <p:clrMapOvr>
+    <a:masterClrMapping/>
+  </p:clrMapOvr>
+  <mc:AlternateContent xmlns:mc="http://schemas.openxmlformats.org/markup-compatibility/2006">
+    <mc:Choice xmlns:p159="http://schemas.microsoft.com/office/powerpoint/2015/09/main" Requires="p159">
+      <p:transition xmlns:p14="http://schemas.microsoft.com/office/powerpoint/2010/main" spd="slow" p14:dur="2000">
+        <p159:morph option="byObject"/>
+      </p:transition>
+    </mc:Choice>
+    <mc:Fallback>
+      <p:transition spd="slow">
+        <p:fade/>
+      </p:transition>
+    </mc:Fallback>
+  </mc:AlternateContent>
 </p:sld>
 </file>
 
 <file path=ppt/slides/slide2.xml><?xml version="1.0" encoding="utf-8"?>
-<p:sld xmlns:a="http://schemas.openxmlformats.org/drawingml/2006/main" xmlns:p="http://schemas.openxmlformats.org/presentationml/2006/main" xmlns:r="http://schemas.openxmlformats.org/officeDocument/2006/relationships">
+<p:sld xmlns:a="http://schemas.openxmlformats.org/drawingml/2006/main" xmlns:r="http://schemas.openxmlformats.org/officeDocument/2006/relationships" xmlns:p="http://schemas.openxmlformats.org/presentationml/2006/main">
   <p:cSld>
     <p:bg>
       <p:bgPr>
@@ -5938,7 +6854,14 @@
         <p:cNvGrpSpPr/>
         <p:nvPr/>
       </p:nvGrpSpPr>
-      <p:grpSpPr/>
+      <p:grpSpPr>
+        <a:xfrm>
+          <a:off x="0" y="0"/>
+          <a:ext cx="0" cy="0"/>
+          <a:chOff x="0" y="0"/>
+          <a:chExt cx="0" cy="0"/>
+        </a:xfrm>
+      </p:grpSpPr>
       <p:sp>
         <p:nvSpPr>
           <p:cNvPr id="2" name="Rectangle 1"/>
@@ -5981,6 +6904,7 @@
           <a:lstStyle/>
           <a:p>
             <a:pPr algn="ctr"/>
+            <a:endParaRPr/>
           </a:p>
         </p:txBody>
       </p:sp>
@@ -6098,6 +7022,7 @@
           <a:lstStyle/>
           <a:p>
             <a:pPr algn="ctr"/>
+            <a:endParaRPr/>
           </a:p>
         </p:txBody>
       </p:sp>
@@ -6150,6 +7075,7 @@
                 <a:latin typeface="Microsoft YaHei"/>
               </a:defRPr>
             </a:pPr>
+            <a:endParaRPr/>
           </a:p>
           <a:p>
             <a:pPr>
@@ -6259,6 +7185,7 @@
           <a:lstStyle/>
           <a:p>
             <a:pPr algn="ctr"/>
+            <a:endParaRPr/>
           </a:p>
         </p:txBody>
       </p:sp>
@@ -6311,6 +7238,7 @@
                 <a:latin typeface="Microsoft YaHei"/>
               </a:defRPr>
             </a:pPr>
+            <a:endParaRPr/>
           </a:p>
           <a:p>
             <a:pPr>
@@ -6420,6 +7348,7 @@
           <a:lstStyle/>
           <a:p>
             <a:pPr algn="ctr"/>
+            <a:endParaRPr/>
           </a:p>
         </p:txBody>
       </p:sp>
@@ -6478,9 +7407,27 @@
                 <a:tableStyleId>{5C22544A-7EE6-4342-B048-85BDC9FD1C3A}</a:tableStyleId>
               </a:tblPr>
               <a:tblGrid>
-                <a:gridCol w="1645920"/>
-                <a:gridCol w="6949440"/>
-                <a:gridCol w="914400"/>
+                <a:gridCol w="1645920">
+                  <a:extLst>
+                    <a:ext uri="{9D8B030D-6E8A-4147-A177-3AD203B41FA5}">
+                      <a16:colId xmlns:a16="http://schemas.microsoft.com/office/drawing/2014/main" val="20000"/>
+                    </a:ext>
+                  </a:extLst>
+                </a:gridCol>
+                <a:gridCol w="6949440">
+                  <a:extLst>
+                    <a:ext uri="{9D8B030D-6E8A-4147-A177-3AD203B41FA5}">
+                      <a16:colId xmlns:a16="http://schemas.microsoft.com/office/drawing/2014/main" val="20001"/>
+                    </a:ext>
+                  </a:extLst>
+                </a:gridCol>
+                <a:gridCol w="914400">
+                  <a:extLst>
+                    <a:ext uri="{9D8B030D-6E8A-4147-A177-3AD203B41FA5}">
+                      <a16:colId xmlns:a16="http://schemas.microsoft.com/office/drawing/2014/main" val="20002"/>
+                    </a:ext>
+                  </a:extLst>
+                </a:gridCol>
               </a:tblGrid>
               <a:tr h="304800">
                 <a:tc>
@@ -6555,6 +7502,11 @@
                     </a:solidFill>
                   </a:tcPr>
                 </a:tc>
+                <a:extLst>
+                  <a:ext uri="{0D108BD9-81ED-4DB2-BD59-A6C34878D82A}">
+                    <a16:rowId xmlns:a16="http://schemas.microsoft.com/office/drawing/2014/main" val="10000"/>
+                  </a:ext>
+                </a:extLst>
               </a:tr>
               <a:tr h="304800">
                 <a:tc>
@@ -6629,6 +7581,11 @@
                     </a:solidFill>
                   </a:tcPr>
                 </a:tc>
+                <a:extLst>
+                  <a:ext uri="{0D108BD9-81ED-4DB2-BD59-A6C34878D82A}">
+                    <a16:rowId xmlns:a16="http://schemas.microsoft.com/office/drawing/2014/main" val="10001"/>
+                  </a:ext>
+                </a:extLst>
               </a:tr>
               <a:tr h="304800">
                 <a:tc>
@@ -6703,6 +7660,11 @@
                     </a:solidFill>
                   </a:tcPr>
                 </a:tc>
+                <a:extLst>
+                  <a:ext uri="{0D108BD9-81ED-4DB2-BD59-A6C34878D82A}">
+                    <a16:rowId xmlns:a16="http://schemas.microsoft.com/office/drawing/2014/main" val="10002"/>
+                  </a:ext>
+                </a:extLst>
               </a:tr>
               <a:tr h="304800">
                 <a:tc>
@@ -6777,6 +7739,11 @@
                     </a:solidFill>
                   </a:tcPr>
                 </a:tc>
+                <a:extLst>
+                  <a:ext uri="{0D108BD9-81ED-4DB2-BD59-A6C34878D82A}">
+                    <a16:rowId xmlns:a16="http://schemas.microsoft.com/office/drawing/2014/main" val="10003"/>
+                  </a:ext>
+                </a:extLst>
               </a:tr>
               <a:tr h="304800">
                 <a:tc>
@@ -6851,6 +7818,11 @@
                     </a:solidFill>
                   </a:tcPr>
                 </a:tc>
+                <a:extLst>
+                  <a:ext uri="{0D108BD9-81ED-4DB2-BD59-A6C34878D82A}">
+                    <a16:rowId xmlns:a16="http://schemas.microsoft.com/office/drawing/2014/main" val="10004"/>
+                  </a:ext>
+                </a:extLst>
               </a:tr>
               <a:tr h="304800">
                 <a:tc>
@@ -6925,6 +7897,11 @@
                     </a:solidFill>
                   </a:tcPr>
                 </a:tc>
+                <a:extLst>
+                  <a:ext uri="{0D108BD9-81ED-4DB2-BD59-A6C34878D82A}">
+                    <a16:rowId xmlns:a16="http://schemas.microsoft.com/office/drawing/2014/main" val="10005"/>
+                  </a:ext>
+                </a:extLst>
               </a:tr>
             </a:tbl>
           </a:graphicData>
@@ -6971,11 +7948,23 @@
   <p:clrMapOvr>
     <a:masterClrMapping/>
   </p:clrMapOvr>
+  <mc:AlternateContent xmlns:mc="http://schemas.openxmlformats.org/markup-compatibility/2006">
+    <mc:Choice xmlns:p159="http://schemas.microsoft.com/office/powerpoint/2015/09/main" Requires="p159">
+      <p:transition xmlns:p14="http://schemas.microsoft.com/office/powerpoint/2010/main" spd="slow" p14:dur="2000">
+        <p159:morph option="byObject"/>
+      </p:transition>
+    </mc:Choice>
+    <mc:Fallback>
+      <p:transition spd="slow">
+        <p:fade/>
+      </p:transition>
+    </mc:Fallback>
+  </mc:AlternateContent>
 </p:sld>
 </file>
 
 <file path=ppt/slides/slide3.xml><?xml version="1.0" encoding="utf-8"?>
-<p:sld xmlns:a="http://schemas.openxmlformats.org/drawingml/2006/main" xmlns:p="http://schemas.openxmlformats.org/presentationml/2006/main" xmlns:r="http://schemas.openxmlformats.org/officeDocument/2006/relationships">
+<p:sld xmlns:a="http://schemas.openxmlformats.org/drawingml/2006/main" xmlns:r="http://schemas.openxmlformats.org/officeDocument/2006/relationships" xmlns:p="http://schemas.openxmlformats.org/presentationml/2006/main">
   <p:cSld>
     <p:bg>
       <p:bgPr>
@@ -6991,7 +7980,14 @@
         <p:cNvGrpSpPr/>
         <p:nvPr/>
       </p:nvGrpSpPr>
-      <p:grpSpPr/>
+      <p:grpSpPr>
+        <a:xfrm>
+          <a:off x="0" y="0"/>
+          <a:ext cx="0" cy="0"/>
+          <a:chOff x="0" y="0"/>
+          <a:chExt cx="0" cy="0"/>
+        </a:xfrm>
+      </p:grpSpPr>
       <p:sp>
         <p:nvSpPr>
           <p:cNvPr id="2" name="Rectangle 1"/>
@@ -7034,6 +8030,7 @@
           <a:lstStyle/>
           <a:p>
             <a:pPr algn="ctr"/>
+            <a:endParaRPr/>
           </a:p>
         </p:txBody>
       </p:sp>
@@ -7151,6 +8148,7 @@
           <a:lstStyle/>
           <a:p>
             <a:pPr algn="ctr"/>
+            <a:endParaRPr/>
           </a:p>
         </p:txBody>
       </p:sp>
@@ -7232,6 +8230,7 @@
           <a:lstStyle/>
           <a:p>
             <a:pPr algn="ctr"/>
+            <a:endParaRPr/>
           </a:p>
         </p:txBody>
       </p:sp>
@@ -7384,6 +8383,7 @@
           <a:lstStyle/>
           <a:p>
             <a:pPr algn="ctr"/>
+            <a:endParaRPr/>
           </a:p>
         </p:txBody>
       </p:sp>
@@ -7465,6 +8465,7 @@
           <a:lstStyle/>
           <a:p>
             <a:pPr algn="ctr"/>
+            <a:endParaRPr/>
           </a:p>
         </p:txBody>
       </p:sp>
@@ -7512,7 +8513,7 @@
         </p:nvSpPr>
         <p:spPr>
           <a:xfrm>
-            <a:off x="6400800" y="1965960"/>
+            <a:off x="6675119" y="1786411"/>
             <a:ext cx="5029200" cy="1737360"/>
           </a:xfrm>
           <a:prstGeom prst="rect">
@@ -7538,6 +8539,7 @@
               </a:defRPr>
             </a:pPr>
             <a:r>
+              <a:rPr dirty="0"/>
               <a:t>S0脚手架→S1首页→S2问答页→S3评分引擎</a:t>
             </a:r>
           </a:p>
@@ -7554,6 +8556,7 @@
               </a:defRPr>
             </a:pPr>
             <a:r>
+              <a:rPr dirty="0"/>
               <a:t>                    ↓                      </a:t>
             </a:r>
           </a:p>
@@ -7570,6 +8573,7 @@
               </a:defRPr>
             </a:pPr>
             <a:r>
+              <a:rPr dirty="0"/>
               <a:t>              S4结果页←S5图表+S6理由        </a:t>
             </a:r>
           </a:p>
@@ -7586,6 +8590,7 @@
               </a:defRPr>
             </a:pPr>
             <a:r>
+              <a:rPr dirty="0"/>
               <a:t>                    ↓                      </a:t>
             </a:r>
           </a:p>
@@ -7602,6 +8607,7 @@
               </a:defRPr>
             </a:pPr>
             <a:r>
+              <a:rPr dirty="0"/>
               <a:t>        S7历史→S8导出  S9管理→S10打磨       </a:t>
             </a:r>
           </a:p>
@@ -7618,6 +8624,7 @@
               </a:defRPr>
             </a:pPr>
             <a:r>
+              <a:rPr dirty="0"/>
               <a:t>                    ↓                      </a:t>
             </a:r>
           </a:p>
@@ -7634,7 +8641,16 @@
               </a:defRPr>
             </a:pPr>
             <a:r>
-              <a:t>          阶段三Flask后端→阶段四封禁系统      </a:t>
+              <a:rPr dirty="0"/>
+              <a:t>          </a:t>
+            </a:r>
+            <a:r>
+              <a:rPr dirty="0" err="1"/>
+              <a:t>阶段三Flask后端→阶段四封禁系统</a:t>
+            </a:r>
+            <a:r>
+              <a:rPr dirty="0"/>
+              <a:t>      </a:t>
             </a:r>
           </a:p>
           <a:p>
@@ -7650,6 +8666,7 @@
               </a:defRPr>
             </a:pPr>
             <a:r>
+              <a:rPr dirty="0"/>
               <a:t>                    ↓                      </a:t>
             </a:r>
           </a:p>
@@ -7666,7 +8683,16 @@
               </a:defRPr>
             </a:pPr>
             <a:r>
-              <a:t>              阶段五PythonAnywhere部署       </a:t>
+              <a:rPr dirty="0"/>
+              <a:t>              </a:t>
+            </a:r>
+            <a:r>
+              <a:rPr dirty="0" err="1"/>
+              <a:t>阶段五PythonAnywhere部署</a:t>
+            </a:r>
+            <a:r>
+              <a:rPr dirty="0"/>
+              <a:t>       </a:t>
             </a:r>
           </a:p>
         </p:txBody>
@@ -7713,6 +8739,7 @@
           <a:lstStyle/>
           <a:p>
             <a:pPr algn="ctr"/>
+            <a:endParaRPr/>
           </a:p>
         </p:txBody>
       </p:sp>
@@ -7794,6 +8821,7 @@
           <a:lstStyle/>
           <a:p>
             <a:pPr algn="ctr"/>
+            <a:endParaRPr/>
           </a:p>
         </p:txBody>
       </p:sp>
@@ -7915,6 +8943,7 @@
           <a:lstStyle/>
           <a:p>
             <a:pPr algn="ctr"/>
+            <a:endParaRPr/>
           </a:p>
         </p:txBody>
       </p:sp>
@@ -8036,6 +9065,7 @@
           <a:lstStyle/>
           <a:p>
             <a:pPr algn="ctr"/>
+            <a:endParaRPr/>
           </a:p>
         </p:txBody>
       </p:sp>
@@ -8156,11 +9186,23 @@
   <p:clrMapOvr>
     <a:masterClrMapping/>
   </p:clrMapOvr>
+  <mc:AlternateContent xmlns:mc="http://schemas.openxmlformats.org/markup-compatibility/2006">
+    <mc:Choice xmlns:p159="http://schemas.microsoft.com/office/powerpoint/2015/09/main" Requires="p159">
+      <p:transition xmlns:p14="http://schemas.microsoft.com/office/powerpoint/2010/main" spd="slow" p14:dur="2000">
+        <p159:morph option="byObject"/>
+      </p:transition>
+    </mc:Choice>
+    <mc:Fallback>
+      <p:transition spd="slow">
+        <p:fade/>
+      </p:transition>
+    </mc:Fallback>
+  </mc:AlternateContent>
 </p:sld>
 </file>
 
 <file path=ppt/slides/slide4.xml><?xml version="1.0" encoding="utf-8"?>
-<p:sld xmlns:a="http://schemas.openxmlformats.org/drawingml/2006/main" xmlns:p="http://schemas.openxmlformats.org/presentationml/2006/main" xmlns:r="http://schemas.openxmlformats.org/officeDocument/2006/relationships">
+<p:sld xmlns:a="http://schemas.openxmlformats.org/drawingml/2006/main" xmlns:r="http://schemas.openxmlformats.org/officeDocument/2006/relationships" xmlns:p="http://schemas.openxmlformats.org/presentationml/2006/main">
   <p:cSld>
     <p:bg>
       <p:bgPr>
@@ -8176,7 +9218,14 @@
         <p:cNvGrpSpPr/>
         <p:nvPr/>
       </p:nvGrpSpPr>
-      <p:grpSpPr/>
+      <p:grpSpPr>
+        <a:xfrm>
+          <a:off x="0" y="0"/>
+          <a:ext cx="0" cy="0"/>
+          <a:chOff x="0" y="0"/>
+          <a:chExt cx="0" cy="0"/>
+        </a:xfrm>
+      </p:grpSpPr>
       <p:sp>
         <p:nvSpPr>
           <p:cNvPr id="2" name="Rectangle 1"/>
@@ -8219,6 +9268,7 @@
           <a:lstStyle/>
           <a:p>
             <a:pPr algn="ctr"/>
+            <a:endParaRPr/>
           </a:p>
         </p:txBody>
       </p:sp>
@@ -8336,6 +9386,7 @@
           <a:lstStyle/>
           <a:p>
             <a:pPr algn="ctr"/>
+            <a:endParaRPr/>
           </a:p>
         </p:txBody>
       </p:sp>
@@ -8347,7 +9398,7 @@
         </p:nvSpPr>
         <p:spPr>
           <a:xfrm>
-            <a:off x="822960" y="1417320"/>
+            <a:off x="822960" y="1390796"/>
             <a:ext cx="4572000" cy="365760"/>
           </a:xfrm>
           <a:prstGeom prst="rect">
@@ -8370,8 +9421,10 @@
               </a:defRPr>
             </a:pPr>
             <a:r>
+              <a:rPr dirty="0" err="1"/>
               <a:t>角色分配</a:t>
             </a:r>
+            <a:endParaRPr dirty="0"/>
           </a:p>
         </p:txBody>
       </p:sp>
@@ -8381,10 +9434,16 @@
           <p:cNvGraphicFramePr>
             <a:graphicFrameLocks noGrp="1"/>
           </p:cNvGraphicFramePr>
-          <p:nvPr/>
+          <p:nvPr>
+            <p:extLst>
+              <p:ext uri="{D42A27DB-BD31-4B8C-83A1-F6EECF244321}">
+                <p14:modId xmlns:p14="http://schemas.microsoft.com/office/powerpoint/2010/main" val="2387022483"/>
+              </p:ext>
+            </p:extLst>
+          </p:nvPr>
         </p:nvGraphicFramePr>
         <p:xfrm>
-          <a:off x="822960" y="1828800"/>
+          <a:off x="822960" y="1737360"/>
           <a:ext cx="9875520" cy="1280160"/>
         </p:xfrm>
         <a:graphic>
@@ -8394,10 +9453,34 @@
                 <a:tableStyleId>{5C22544A-7EE6-4342-B048-85BDC9FD1C3A}</a:tableStyleId>
               </a:tblPr>
               <a:tblGrid>
-                <a:gridCol w="1188720"/>
-                <a:gridCol w="1371600"/>
-                <a:gridCol w="5943600"/>
-                <a:gridCol w="1371600"/>
+                <a:gridCol w="1188720">
+                  <a:extLst>
+                    <a:ext uri="{9D8B030D-6E8A-4147-A177-3AD203B41FA5}">
+                      <a16:colId xmlns:a16="http://schemas.microsoft.com/office/drawing/2014/main" val="20000"/>
+                    </a:ext>
+                  </a:extLst>
+                </a:gridCol>
+                <a:gridCol w="1371600">
+                  <a:extLst>
+                    <a:ext uri="{9D8B030D-6E8A-4147-A177-3AD203B41FA5}">
+                      <a16:colId xmlns:a16="http://schemas.microsoft.com/office/drawing/2014/main" val="20001"/>
+                    </a:ext>
+                  </a:extLst>
+                </a:gridCol>
+                <a:gridCol w="5943600">
+                  <a:extLst>
+                    <a:ext uri="{9D8B030D-6E8A-4147-A177-3AD203B41FA5}">
+                      <a16:colId xmlns:a16="http://schemas.microsoft.com/office/drawing/2014/main" val="20002"/>
+                    </a:ext>
+                  </a:extLst>
+                </a:gridCol>
+                <a:gridCol w="1371600">
+                  <a:extLst>
+                    <a:ext uri="{9D8B030D-6E8A-4147-A177-3AD203B41FA5}">
+                      <a16:colId xmlns:a16="http://schemas.microsoft.com/office/drawing/2014/main" val="20003"/>
+                    </a:ext>
+                  </a:extLst>
+                </a:gridCol>
               </a:tblGrid>
               <a:tr h="320040">
                 <a:tc>
@@ -8496,6 +9579,11 @@
                     </a:solidFill>
                   </a:tcPr>
                 </a:tc>
+                <a:extLst>
+                  <a:ext uri="{0D108BD9-81ED-4DB2-BD59-A6C34878D82A}">
+                    <a16:rowId xmlns:a16="http://schemas.microsoft.com/office/drawing/2014/main" val="10000"/>
+                  </a:ext>
+                </a:extLst>
               </a:tr>
               <a:tr h="320040">
                 <a:tc>
@@ -8594,6 +9682,11 @@
                     </a:solidFill>
                   </a:tcPr>
                 </a:tc>
+                <a:extLst>
+                  <a:ext uri="{0D108BD9-81ED-4DB2-BD59-A6C34878D82A}">
+                    <a16:rowId xmlns:a16="http://schemas.microsoft.com/office/drawing/2014/main" val="10001"/>
+                  </a:ext>
+                </a:extLst>
               </a:tr>
               <a:tr h="320040">
                 <a:tc>
@@ -8658,8 +9751,10 @@
                         </a:defRPr>
                       </a:pPr>
                       <a:r>
+                        <a:rPr dirty="0" err="1"/>
                         <a:t>Flask骨架、认证系统、SQLite数据库、API接口、权限中间件</a:t>
                       </a:r>
+                      <a:endParaRPr dirty="0"/>
                     </a:p>
                   </a:txBody>
                   <a:tcPr>
@@ -8692,6 +9787,11 @@
                     </a:solidFill>
                   </a:tcPr>
                 </a:tc>
+                <a:extLst>
+                  <a:ext uri="{0D108BD9-81ED-4DB2-BD59-A6C34878D82A}">
+                    <a16:rowId xmlns:a16="http://schemas.microsoft.com/office/drawing/2014/main" val="10002"/>
+                  </a:ext>
+                </a:extLst>
               </a:tr>
               <a:tr h="320040">
                 <a:tc>
@@ -8780,6 +9880,7 @@
                         </a:defRPr>
                       </a:pPr>
                       <a:r>
+                        <a:rPr dirty="0"/>
                         <a:t>Claude Code</a:t>
                       </a:r>
                     </a:p>
@@ -8790,6 +9891,11 @@
                     </a:solidFill>
                   </a:tcPr>
                 </a:tc>
+                <a:extLst>
+                  <a:ext uri="{0D108BD9-81ED-4DB2-BD59-A6C34878D82A}">
+                    <a16:rowId xmlns:a16="http://schemas.microsoft.com/office/drawing/2014/main" val="10003"/>
+                  </a:ext>
+                </a:extLst>
               </a:tr>
             </a:tbl>
           </a:graphicData>
@@ -8837,6 +9943,7 @@
           <a:lstStyle/>
           <a:p>
             <a:pPr algn="ctr"/>
+            <a:endParaRPr/>
           </a:p>
         </p:txBody>
       </p:sp>
@@ -8848,7 +9955,7 @@
         </p:nvSpPr>
         <p:spPr>
           <a:xfrm>
-            <a:off x="822960" y="3520440"/>
+            <a:off x="822960" y="3480775"/>
             <a:ext cx="4572000" cy="365760"/>
           </a:xfrm>
           <a:prstGeom prst="rect">
@@ -8871,8 +9978,10 @@
               </a:defRPr>
             </a:pPr>
             <a:r>
+              <a:rPr dirty="0" err="1"/>
               <a:t>各阶段参与度</a:t>
             </a:r>
+            <a:endParaRPr dirty="0"/>
           </a:p>
         </p:txBody>
       </p:sp>
@@ -8882,11 +9991,17 @@
           <p:cNvGraphicFramePr>
             <a:graphicFrameLocks noGrp="1"/>
           </p:cNvGraphicFramePr>
-          <p:nvPr/>
+          <p:nvPr>
+            <p:extLst>
+              <p:ext uri="{D42A27DB-BD31-4B8C-83A1-F6EECF244321}">
+                <p14:modId xmlns:p14="http://schemas.microsoft.com/office/powerpoint/2010/main" val="2213524384"/>
+              </p:ext>
+            </p:extLst>
+          </p:nvPr>
         </p:nvGraphicFramePr>
         <p:xfrm>
-          <a:off x="822960" y="3931920"/>
-          <a:ext cx="10515600" cy="1828800"/>
+          <a:off x="822960" y="3810807"/>
+          <a:ext cx="10515600" cy="2072640"/>
         </p:xfrm>
         <a:graphic>
           <a:graphicData uri="http://schemas.openxmlformats.org/drawingml/2006/table">
@@ -8895,10 +10010,34 @@
                 <a:tableStyleId>{5C22544A-7EE6-4342-B048-85BDC9FD1C3A}</a:tableStyleId>
               </a:tblPr>
               <a:tblGrid>
-                <a:gridCol w="2743200"/>
-                <a:gridCol w="2743200"/>
-                <a:gridCol w="2743200"/>
-                <a:gridCol w="2286000"/>
+                <a:gridCol w="2743200">
+                  <a:extLst>
+                    <a:ext uri="{9D8B030D-6E8A-4147-A177-3AD203B41FA5}">
+                      <a16:colId xmlns:a16="http://schemas.microsoft.com/office/drawing/2014/main" val="20000"/>
+                    </a:ext>
+                  </a:extLst>
+                </a:gridCol>
+                <a:gridCol w="2743200">
+                  <a:extLst>
+                    <a:ext uri="{9D8B030D-6E8A-4147-A177-3AD203B41FA5}">
+                      <a16:colId xmlns:a16="http://schemas.microsoft.com/office/drawing/2014/main" val="20001"/>
+                    </a:ext>
+                  </a:extLst>
+                </a:gridCol>
+                <a:gridCol w="2743200">
+                  <a:extLst>
+                    <a:ext uri="{9D8B030D-6E8A-4147-A177-3AD203B41FA5}">
+                      <a16:colId xmlns:a16="http://schemas.microsoft.com/office/drawing/2014/main" val="20002"/>
+                    </a:ext>
+                  </a:extLst>
+                </a:gridCol>
+                <a:gridCol w="2286000">
+                  <a:extLst>
+                    <a:ext uri="{9D8B030D-6E8A-4147-A177-3AD203B41FA5}">
+                      <a16:colId xmlns:a16="http://schemas.microsoft.com/office/drawing/2014/main" val="20003"/>
+                    </a:ext>
+                  </a:extLst>
+                </a:gridCol>
               </a:tblGrid>
               <a:tr h="228600">
                 <a:tc>
@@ -8939,7 +10078,12 @@
                         </a:defRPr>
                       </a:pPr>
                       <a:r>
-                        <a:t>A（架构）</a:t>
+                        <a:rPr dirty="0" err="1"/>
+                        <a:t>A（架构</a:t>
+                      </a:r>
+                      <a:r>
+                        <a:rPr dirty="0"/>
+                        <a:t>）</a:t>
                       </a:r>
                     </a:p>
                   </a:txBody>
@@ -8997,6 +10141,11 @@
                     </a:solidFill>
                   </a:tcPr>
                 </a:tc>
+                <a:extLst>
+                  <a:ext uri="{0D108BD9-81ED-4DB2-BD59-A6C34878D82A}">
+                    <a16:rowId xmlns:a16="http://schemas.microsoft.com/office/drawing/2014/main" val="10000"/>
+                  </a:ext>
+                </a:extLst>
               </a:tr>
               <a:tr h="228600">
                 <a:tc>
@@ -9095,6 +10244,11 @@
                     </a:solidFill>
                   </a:tcPr>
                 </a:tc>
+                <a:extLst>
+                  <a:ext uri="{0D108BD9-81ED-4DB2-BD59-A6C34878D82A}">
+                    <a16:rowId xmlns:a16="http://schemas.microsoft.com/office/drawing/2014/main" val="10001"/>
+                  </a:ext>
+                </a:extLst>
               </a:tr>
               <a:tr h="228600">
                 <a:tc>
@@ -9193,6 +10347,11 @@
                     </a:solidFill>
                   </a:tcPr>
                 </a:tc>
+                <a:extLst>
+                  <a:ext uri="{0D108BD9-81ED-4DB2-BD59-A6C34878D82A}">
+                    <a16:rowId xmlns:a16="http://schemas.microsoft.com/office/drawing/2014/main" val="10002"/>
+                  </a:ext>
+                </a:extLst>
               </a:tr>
               <a:tr h="228600">
                 <a:tc>
@@ -9291,6 +10450,11 @@
                     </a:solidFill>
                   </a:tcPr>
                 </a:tc>
+                <a:extLst>
+                  <a:ext uri="{0D108BD9-81ED-4DB2-BD59-A6C34878D82A}">
+                    <a16:rowId xmlns:a16="http://schemas.microsoft.com/office/drawing/2014/main" val="10003"/>
+                  </a:ext>
+                </a:extLst>
               </a:tr>
               <a:tr h="228600">
                 <a:tc>
@@ -9389,6 +10553,11 @@
                     </a:solidFill>
                   </a:tcPr>
                 </a:tc>
+                <a:extLst>
+                  <a:ext uri="{0D108BD9-81ED-4DB2-BD59-A6C34878D82A}">
+                    <a16:rowId xmlns:a16="http://schemas.microsoft.com/office/drawing/2014/main" val="10004"/>
+                  </a:ext>
+                </a:extLst>
               </a:tr>
               <a:tr h="228600">
                 <a:tc>
@@ -9487,6 +10656,11 @@
                     </a:solidFill>
                   </a:tcPr>
                 </a:tc>
+                <a:extLst>
+                  <a:ext uri="{0D108BD9-81ED-4DB2-BD59-A6C34878D82A}">
+                    <a16:rowId xmlns:a16="http://schemas.microsoft.com/office/drawing/2014/main" val="10005"/>
+                  </a:ext>
+                </a:extLst>
               </a:tr>
               <a:tr h="228600">
                 <a:tc>
@@ -9585,6 +10759,11 @@
                     </a:solidFill>
                   </a:tcPr>
                 </a:tc>
+                <a:extLst>
+                  <a:ext uri="{0D108BD9-81ED-4DB2-BD59-A6C34878D82A}">
+                    <a16:rowId xmlns:a16="http://schemas.microsoft.com/office/drawing/2014/main" val="10006"/>
+                  </a:ext>
+                </a:extLst>
               </a:tr>
               <a:tr h="228600">
                 <a:tc>
@@ -9601,8 +10780,10 @@
                         </a:defRPr>
                       </a:pPr>
                       <a:r>
+                        <a:rPr dirty="0" err="1"/>
                         <a:t>PythonAnywhere部署</a:t>
                       </a:r>
+                      <a:endParaRPr dirty="0"/>
                     </a:p>
                   </a:txBody>
                   <a:tcPr>
@@ -9673,8 +10854,14 @@
                         </a:defRPr>
                       </a:pPr>
                       <a:r>
-                        <a:t>★ 主导</a:t>
-                      </a:r>
+                        <a:rPr dirty="0"/>
+                        <a:t>★ </a:t>
+                      </a:r>
+                      <a:r>
+                        <a:rPr dirty="0" err="1"/>
+                        <a:t>主导</a:t>
+                      </a:r>
+                      <a:endParaRPr dirty="0"/>
                     </a:p>
                   </a:txBody>
                   <a:tcPr>
@@ -9683,6 +10870,11 @@
                     </a:solidFill>
                   </a:tcPr>
                 </a:tc>
+                <a:extLst>
+                  <a:ext uri="{0D108BD9-81ED-4DB2-BD59-A6C34878D82A}">
+                    <a16:rowId xmlns:a16="http://schemas.microsoft.com/office/drawing/2014/main" val="10007"/>
+                  </a:ext>
+                </a:extLst>
               </a:tr>
             </a:tbl>
           </a:graphicData>
@@ -9729,11 +10921,23 @@
   <p:clrMapOvr>
     <a:masterClrMapping/>
   </p:clrMapOvr>
+  <mc:AlternateContent xmlns:mc="http://schemas.openxmlformats.org/markup-compatibility/2006">
+    <mc:Choice xmlns:p159="http://schemas.microsoft.com/office/powerpoint/2015/09/main" Requires="p159">
+      <p:transition xmlns:p14="http://schemas.microsoft.com/office/powerpoint/2010/main" spd="slow" p14:dur="2000">
+        <p159:morph option="byObject"/>
+      </p:transition>
+    </mc:Choice>
+    <mc:Fallback>
+      <p:transition spd="slow">
+        <p:fade/>
+      </p:transition>
+    </mc:Fallback>
+  </mc:AlternateContent>
 </p:sld>
 </file>
 
 <file path=ppt/slides/slide5.xml><?xml version="1.0" encoding="utf-8"?>
-<p:sld xmlns:a="http://schemas.openxmlformats.org/drawingml/2006/main" xmlns:p="http://schemas.openxmlformats.org/presentationml/2006/main" xmlns:r="http://schemas.openxmlformats.org/officeDocument/2006/relationships">
+<p:sld xmlns:a="http://schemas.openxmlformats.org/drawingml/2006/main" xmlns:r="http://schemas.openxmlformats.org/officeDocument/2006/relationships" xmlns:p="http://schemas.openxmlformats.org/presentationml/2006/main">
   <p:cSld>
     <p:bg>
       <p:bgPr>
@@ -9749,7 +10953,14 @@
         <p:cNvGrpSpPr/>
         <p:nvPr/>
       </p:nvGrpSpPr>
-      <p:grpSpPr/>
+      <p:grpSpPr>
+        <a:xfrm>
+          <a:off x="0" y="0"/>
+          <a:ext cx="0" cy="0"/>
+          <a:chOff x="0" y="0"/>
+          <a:chExt cx="0" cy="0"/>
+        </a:xfrm>
+      </p:grpSpPr>
       <p:sp>
         <p:nvSpPr>
           <p:cNvPr id="2" name="Rectangle 1"/>
@@ -9792,6 +11003,7 @@
           <a:lstStyle/>
           <a:p>
             <a:pPr algn="ctr"/>
+            <a:endParaRPr/>
           </a:p>
         </p:txBody>
       </p:sp>
@@ -9840,7 +11052,7 @@
         <p:spPr>
           <a:xfrm>
             <a:off x="731520" y="658368"/>
-            <a:ext cx="10058400" cy="320040"/>
+            <a:ext cx="10058400" cy="292388"/>
           </a:xfrm>
           <a:prstGeom prst="rect">
             <a:avLst/>
@@ -9862,7 +11074,12 @@
               </a:defRPr>
             </a:pPr>
             <a:r>
-              <a:t>答辩要求 2 — 6个演示点 · 约5分钟</a:t>
+              <a:rPr dirty="0" err="1"/>
+              <a:t>答辩要求</a:t>
+            </a:r>
+            <a:r>
+              <a:rPr dirty="0"/>
+              <a:t> 2 </a:t>
             </a:r>
           </a:p>
         </p:txBody>
@@ -9909,6 +11126,7 @@
           <a:lstStyle/>
           <a:p>
             <a:pPr algn="ctr"/>
+            <a:endParaRPr/>
           </a:p>
         </p:txBody>
       </p:sp>
@@ -9967,10 +11185,34 @@
                 <a:tableStyleId>{5C22544A-7EE6-4342-B048-85BDC9FD1C3A}</a:tableStyleId>
               </a:tblPr>
               <a:tblGrid>
-                <a:gridCol w="548640"/>
-                <a:gridCol w="4114800"/>
-                <a:gridCol w="822960"/>
-                <a:gridCol w="4572000"/>
+                <a:gridCol w="548640">
+                  <a:extLst>
+                    <a:ext uri="{9D8B030D-6E8A-4147-A177-3AD203B41FA5}">
+                      <a16:colId xmlns:a16="http://schemas.microsoft.com/office/drawing/2014/main" val="20000"/>
+                    </a:ext>
+                  </a:extLst>
+                </a:gridCol>
+                <a:gridCol w="4114800">
+                  <a:extLst>
+                    <a:ext uri="{9D8B030D-6E8A-4147-A177-3AD203B41FA5}">
+                      <a16:colId xmlns:a16="http://schemas.microsoft.com/office/drawing/2014/main" val="20001"/>
+                    </a:ext>
+                  </a:extLst>
+                </a:gridCol>
+                <a:gridCol w="822960">
+                  <a:extLst>
+                    <a:ext uri="{9D8B030D-6E8A-4147-A177-3AD203B41FA5}">
+                      <a16:colId xmlns:a16="http://schemas.microsoft.com/office/drawing/2014/main" val="20002"/>
+                    </a:ext>
+                  </a:extLst>
+                </a:gridCol>
+                <a:gridCol w="4572000">
+                  <a:extLst>
+                    <a:ext uri="{9D8B030D-6E8A-4147-A177-3AD203B41FA5}">
+                      <a16:colId xmlns:a16="http://schemas.microsoft.com/office/drawing/2014/main" val="20003"/>
+                    </a:ext>
+                  </a:extLst>
+                </a:gridCol>
               </a:tblGrid>
               <a:tr h="326571">
                 <a:tc>
@@ -10069,6 +11311,11 @@
                     </a:solidFill>
                   </a:tcPr>
                 </a:tc>
+                <a:extLst>
+                  <a:ext uri="{0D108BD9-81ED-4DB2-BD59-A6C34878D82A}">
+                    <a16:rowId xmlns:a16="http://schemas.microsoft.com/office/drawing/2014/main" val="10000"/>
+                  </a:ext>
+                </a:extLst>
               </a:tr>
               <a:tr h="326571">
                 <a:tc>
@@ -10167,6 +11414,11 @@
                     </a:solidFill>
                   </a:tcPr>
                 </a:tc>
+                <a:extLst>
+                  <a:ext uri="{0D108BD9-81ED-4DB2-BD59-A6C34878D82A}">
+                    <a16:rowId xmlns:a16="http://schemas.microsoft.com/office/drawing/2014/main" val="10001"/>
+                  </a:ext>
+                </a:extLst>
               </a:tr>
               <a:tr h="326571">
                 <a:tc>
@@ -10265,6 +11517,11 @@
                     </a:solidFill>
                   </a:tcPr>
                 </a:tc>
+                <a:extLst>
+                  <a:ext uri="{0D108BD9-81ED-4DB2-BD59-A6C34878D82A}">
+                    <a16:rowId xmlns:a16="http://schemas.microsoft.com/office/drawing/2014/main" val="10002"/>
+                  </a:ext>
+                </a:extLst>
               </a:tr>
               <a:tr h="326571">
                 <a:tc>
@@ -10363,6 +11620,11 @@
                     </a:solidFill>
                   </a:tcPr>
                 </a:tc>
+                <a:extLst>
+                  <a:ext uri="{0D108BD9-81ED-4DB2-BD59-A6C34878D82A}">
+                    <a16:rowId xmlns:a16="http://schemas.microsoft.com/office/drawing/2014/main" val="10003"/>
+                  </a:ext>
+                </a:extLst>
               </a:tr>
               <a:tr h="326571">
                 <a:tc>
@@ -10461,6 +11723,11 @@
                     </a:solidFill>
                   </a:tcPr>
                 </a:tc>
+                <a:extLst>
+                  <a:ext uri="{0D108BD9-81ED-4DB2-BD59-A6C34878D82A}">
+                    <a16:rowId xmlns:a16="http://schemas.microsoft.com/office/drawing/2014/main" val="10004"/>
+                  </a:ext>
+                </a:extLst>
               </a:tr>
               <a:tr h="326571">
                 <a:tc>
@@ -10559,6 +11826,11 @@
                     </a:solidFill>
                   </a:tcPr>
                 </a:tc>
+                <a:extLst>
+                  <a:ext uri="{0D108BD9-81ED-4DB2-BD59-A6C34878D82A}">
+                    <a16:rowId xmlns:a16="http://schemas.microsoft.com/office/drawing/2014/main" val="10005"/>
+                  </a:ext>
+                </a:extLst>
               </a:tr>
               <a:tr h="326574">
                 <a:tc>
@@ -10657,6 +11929,11 @@
                     </a:solidFill>
                   </a:tcPr>
                 </a:tc>
+                <a:extLst>
+                  <a:ext uri="{0D108BD9-81ED-4DB2-BD59-A6C34878D82A}">
+                    <a16:rowId xmlns:a16="http://schemas.microsoft.com/office/drawing/2014/main" val="10006"/>
+                  </a:ext>
+                </a:extLst>
               </a:tr>
             </a:tbl>
           </a:graphicData>
@@ -10704,6 +11981,7 @@
           <a:lstStyle/>
           <a:p>
             <a:pPr algn="ctr"/>
+            <a:endParaRPr/>
           </a:p>
         </p:txBody>
       </p:sp>
@@ -10871,11 +12149,23 @@
   <p:clrMapOvr>
     <a:masterClrMapping/>
   </p:clrMapOvr>
+  <mc:AlternateContent xmlns:mc="http://schemas.openxmlformats.org/markup-compatibility/2006">
+    <mc:Choice xmlns:p159="http://schemas.microsoft.com/office/powerpoint/2015/09/main" Requires="p159">
+      <p:transition xmlns:p14="http://schemas.microsoft.com/office/powerpoint/2010/main" spd="slow" p14:dur="2000">
+        <p159:morph option="byObject"/>
+      </p:transition>
+    </mc:Choice>
+    <mc:Fallback>
+      <p:transition spd="slow">
+        <p:fade/>
+      </p:transition>
+    </mc:Fallback>
+  </mc:AlternateContent>
 </p:sld>
 </file>
 
 <file path=ppt/slides/slide6.xml><?xml version="1.0" encoding="utf-8"?>
-<p:sld xmlns:a="http://schemas.openxmlformats.org/drawingml/2006/main" xmlns:p="http://schemas.openxmlformats.org/presentationml/2006/main" xmlns:r="http://schemas.openxmlformats.org/officeDocument/2006/relationships">
+<p:sld xmlns:a="http://schemas.openxmlformats.org/drawingml/2006/main" xmlns:r="http://schemas.openxmlformats.org/officeDocument/2006/relationships" xmlns:p="http://schemas.openxmlformats.org/presentationml/2006/main">
   <p:cSld>
     <p:bg>
       <p:bgPr>
@@ -10891,7 +12181,14 @@
         <p:cNvGrpSpPr/>
         <p:nvPr/>
       </p:nvGrpSpPr>
-      <p:grpSpPr/>
+      <p:grpSpPr>
+        <a:xfrm>
+          <a:off x="0" y="0"/>
+          <a:ext cx="0" cy="0"/>
+          <a:chOff x="0" y="0"/>
+          <a:chExt cx="0" cy="0"/>
+        </a:xfrm>
+      </p:grpSpPr>
       <p:sp>
         <p:nvSpPr>
           <p:cNvPr id="2" name="Rectangle 1"/>
@@ -10934,6 +12231,7 @@
           <a:lstStyle/>
           <a:p>
             <a:pPr algn="ctr"/>
+            <a:endParaRPr/>
           </a:p>
         </p:txBody>
       </p:sp>
@@ -11051,6 +12349,7 @@
           <a:lstStyle/>
           <a:p>
             <a:pPr algn="ctr"/>
+            <a:endParaRPr/>
           </a:p>
         </p:txBody>
       </p:sp>
@@ -11099,7 +12398,7 @@
         <p:spPr>
           <a:xfrm>
             <a:off x="822960" y="1920240"/>
-            <a:ext cx="6400800" cy="4206240"/>
+            <a:ext cx="6400800" cy="3642023"/>
           </a:xfrm>
           <a:prstGeom prst="rect">
             <a:avLst/>
@@ -11124,34 +12423,284 @@
               </a:defRPr>
             </a:pPr>
             <a:r>
-              <a:t>"你现在是 Step 2：问答页的开发。依赖 Step 0 和 Step 1。请实现：1. 创建 js/router.js — 页面切换函数（display 显隐 + init 函数）</a:t>
-            </a:r>
-            <a:br/>
-            <a:r>
-              <a:t>2. 创建 js/services/questionService.js — selectQuestions() 按权重排序选题</a:t>
-            </a:r>
-            <a:br/>
-            <a:r>
-              <a:t>3. 创建 js/components/progressBar.js — updateProgress(current, total)</a:t>
-            </a:r>
-            <a:br/>
-            <a:r>
-              <a:t>4. 创建 js/components/slider.js — 滑块渲染（默认值3）+</a:t>
-            </a:r>
-            <a:br/>
-            <a:r>
-              <a:t>   bindSliderEvents() 实时更新分数（&gt;=4 加 .high 类）+ collectScores()</a:t>
-            </a:r>
-            <a:br/>
-            <a:r>
-              <a:t>5. 修改 index.html 为多页面容器</a:t>
-            </a:r>
-            <a:br/>
-            <a:r>
-              <a:t>6. 修改 app.js 整合路由 + 问答页逻辑</a:t>
-            </a:r>
-            <a:br/>
-            <a:r>
+              <a:rPr sz="1600" dirty="0"/>
+              <a:t>"</a:t>
+            </a:r>
+            <a:r>
+              <a:rPr sz="1600" dirty="0" err="1"/>
+              <a:t>你现在是</a:t>
+            </a:r>
+            <a:r>
+              <a:rPr sz="1600" dirty="0"/>
+              <a:t> Step 2：问答页的开发。</a:t>
+            </a:r>
+            <a:endParaRPr lang="en-US" sz="1600" dirty="0"/>
+          </a:p>
+          <a:p>
+            <a:pPr>
+              <a:spcAft>
+                <a:spcPts val="400"/>
+              </a:spcAft>
+              <a:defRPr sz="1100" b="0">
+                <a:solidFill>
+                  <a:srgbClr val="3A3A3A"/>
+                </a:solidFill>
+                <a:latin typeface="Microsoft YaHei"/>
+              </a:defRPr>
+            </a:pPr>
+            <a:r>
+              <a:rPr sz="1600" dirty="0" err="1"/>
+              <a:t>依赖</a:t>
+            </a:r>
+            <a:r>
+              <a:rPr sz="1600" dirty="0"/>
+              <a:t> Step 0 和 Step 1。请实现：</a:t>
+            </a:r>
+            <a:endParaRPr lang="en-US" sz="1600" dirty="0"/>
+          </a:p>
+          <a:p>
+            <a:pPr>
+              <a:spcAft>
+                <a:spcPts val="400"/>
+              </a:spcAft>
+              <a:defRPr sz="1100" b="0">
+                <a:solidFill>
+                  <a:srgbClr val="3A3A3A"/>
+                </a:solidFill>
+                <a:latin typeface="Microsoft YaHei"/>
+              </a:defRPr>
+            </a:pPr>
+            <a:r>
+              <a:rPr sz="1600" dirty="0"/>
+              <a:t>1. </a:t>
+            </a:r>
+            <a:r>
+              <a:rPr sz="1600" dirty="0" err="1"/>
+              <a:t>创建</a:t>
+            </a:r>
+            <a:r>
+              <a:rPr sz="1600" dirty="0"/>
+              <a:t> </a:t>
+            </a:r>
+            <a:r>
+              <a:rPr sz="1600" dirty="0" err="1"/>
+              <a:t>js</a:t>
+            </a:r>
+            <a:r>
+              <a:rPr sz="1600" dirty="0"/>
+              <a:t>/router.js — </a:t>
+            </a:r>
+            <a:r>
+              <a:rPr sz="1600" dirty="0" err="1"/>
+              <a:t>页面切换函数（display</a:t>
+            </a:r>
+            <a:r>
+              <a:rPr sz="1600" dirty="0"/>
+              <a:t> </a:t>
+            </a:r>
+            <a:r>
+              <a:rPr sz="1600" dirty="0" err="1"/>
+              <a:t>显隐</a:t>
+            </a:r>
+            <a:r>
+              <a:rPr sz="1600" dirty="0"/>
+              <a:t> + </a:t>
+            </a:r>
+            <a:r>
+              <a:rPr sz="1600" dirty="0" err="1"/>
+              <a:t>init</a:t>
+            </a:r>
+            <a:r>
+              <a:rPr sz="1600" dirty="0"/>
+              <a:t> </a:t>
+            </a:r>
+            <a:r>
+              <a:rPr sz="1600" dirty="0" err="1"/>
+              <a:t>函数</a:t>
+            </a:r>
+            <a:r>
+              <a:rPr sz="1600" dirty="0"/>
+              <a:t>）</a:t>
+            </a:r>
+            <a:br>
+              <a:rPr sz="1600" dirty="0"/>
+            </a:br>
+            <a:r>
+              <a:rPr sz="1600" dirty="0"/>
+              <a:t>2. </a:t>
+            </a:r>
+            <a:r>
+              <a:rPr sz="1600" dirty="0" err="1"/>
+              <a:t>创建</a:t>
+            </a:r>
+            <a:r>
+              <a:rPr sz="1600" dirty="0"/>
+              <a:t> </a:t>
+            </a:r>
+            <a:r>
+              <a:rPr sz="1600" dirty="0" err="1"/>
+              <a:t>js</a:t>
+            </a:r>
+            <a:r>
+              <a:rPr sz="1600" dirty="0"/>
+              <a:t>/services/questionService.js — </a:t>
+            </a:r>
+            <a:r>
+              <a:rPr sz="1600" dirty="0" err="1"/>
+              <a:t>selectQuestions</a:t>
+            </a:r>
+            <a:r>
+              <a:rPr sz="1600" dirty="0"/>
+              <a:t>() </a:t>
+            </a:r>
+            <a:r>
+              <a:rPr sz="1600" dirty="0" err="1"/>
+              <a:t>按权重排序选题</a:t>
+            </a:r>
+            <a:br>
+              <a:rPr sz="1600" dirty="0"/>
+            </a:br>
+            <a:r>
+              <a:rPr sz="1600" dirty="0"/>
+              <a:t>3. </a:t>
+            </a:r>
+            <a:r>
+              <a:rPr sz="1600" dirty="0" err="1"/>
+              <a:t>创建</a:t>
+            </a:r>
+            <a:r>
+              <a:rPr sz="1600" dirty="0"/>
+              <a:t> </a:t>
+            </a:r>
+            <a:r>
+              <a:rPr sz="1600" dirty="0" err="1"/>
+              <a:t>js</a:t>
+            </a:r>
+            <a:r>
+              <a:rPr sz="1600" dirty="0"/>
+              <a:t>/components/progressBar.js — </a:t>
+            </a:r>
+            <a:r>
+              <a:rPr lang="en-US" sz="1600" dirty="0"/>
+              <a:t>       </a:t>
+            </a:r>
+            <a:r>
+              <a:rPr sz="1600" dirty="0" err="1"/>
+              <a:t>updateProgress</a:t>
+            </a:r>
+            <a:r>
+              <a:rPr sz="1600" dirty="0"/>
+              <a:t>(current, total)</a:t>
+            </a:r>
+            <a:br>
+              <a:rPr sz="1600" dirty="0"/>
+            </a:br>
+            <a:r>
+              <a:rPr sz="1600" dirty="0"/>
+              <a:t>4. </a:t>
+            </a:r>
+            <a:r>
+              <a:rPr sz="1600" dirty="0" err="1"/>
+              <a:t>创建</a:t>
+            </a:r>
+            <a:r>
+              <a:rPr sz="1600" dirty="0"/>
+              <a:t> </a:t>
+            </a:r>
+            <a:r>
+              <a:rPr sz="1600" dirty="0" err="1"/>
+              <a:t>js</a:t>
+            </a:r>
+            <a:r>
+              <a:rPr sz="1600" dirty="0"/>
+              <a:t>/components/slider.js — 滑块渲染（默认值3）+</a:t>
+            </a:r>
+            <a:br>
+              <a:rPr sz="1600" dirty="0"/>
+            </a:br>
+            <a:r>
+              <a:rPr sz="1600" dirty="0"/>
+              <a:t>   </a:t>
+            </a:r>
+            <a:r>
+              <a:rPr sz="1600" dirty="0" err="1"/>
+              <a:t>bindSliderEvents</a:t>
+            </a:r>
+            <a:r>
+              <a:rPr sz="1600" dirty="0"/>
+              <a:t>() </a:t>
+            </a:r>
+            <a:r>
+              <a:rPr sz="1600" dirty="0" err="1"/>
+              <a:t>实时更新分数</a:t>
+            </a:r>
+            <a:r>
+              <a:rPr sz="1600" dirty="0"/>
+              <a:t>（&gt;=4 加 .high 类）+ </a:t>
+            </a:r>
+            <a:r>
+              <a:rPr lang="en-US" sz="1600" dirty="0"/>
+              <a:t>  </a:t>
+            </a:r>
+            <a:r>
+              <a:rPr sz="1600" dirty="0" err="1"/>
+              <a:t>collectScores</a:t>
+            </a:r>
+            <a:r>
+              <a:rPr sz="1600" dirty="0"/>
+              <a:t>()</a:t>
+            </a:r>
+            <a:br>
+              <a:rPr sz="1600" dirty="0"/>
+            </a:br>
+            <a:r>
+              <a:rPr sz="1600" dirty="0"/>
+              <a:t>5. </a:t>
+            </a:r>
+            <a:r>
+              <a:rPr sz="1600" dirty="0" err="1"/>
+              <a:t>修改</a:t>
+            </a:r>
+            <a:r>
+              <a:rPr sz="1600" dirty="0"/>
+              <a:t> index.html </a:t>
+            </a:r>
+            <a:r>
+              <a:rPr sz="1600" dirty="0" err="1"/>
+              <a:t>为多页面容器</a:t>
+            </a:r>
+            <a:br>
+              <a:rPr sz="1600" dirty="0"/>
+            </a:br>
+            <a:r>
+              <a:rPr sz="1600" dirty="0"/>
+              <a:t>6. </a:t>
+            </a:r>
+            <a:r>
+              <a:rPr sz="1600" dirty="0" err="1"/>
+              <a:t>修改</a:t>
+            </a:r>
+            <a:r>
+              <a:rPr sz="1600" dirty="0"/>
+              <a:t> app.js </a:t>
+            </a:r>
+            <a:r>
+              <a:rPr sz="1600" dirty="0" err="1"/>
+              <a:t>整合路由</a:t>
+            </a:r>
+            <a:r>
+              <a:rPr sz="1600" dirty="0"/>
+              <a:t> + </a:t>
+            </a:r>
+            <a:r>
+              <a:rPr sz="1600" dirty="0" err="1"/>
+              <a:t>问答页逻辑</a:t>
+            </a:r>
+            <a:br>
+              <a:rPr sz="1600" dirty="0"/>
+            </a:br>
+            <a:r>
+              <a:rPr sz="1600" dirty="0"/>
               <a:t>完成标准：首页输入3选项→进入问答→进度条+权重badge→滑块打分→前后导航→最后一题变粉色"</a:t>
             </a:r>
           </a:p>
@@ -11199,6 +12748,7 @@
           <a:lstStyle/>
           <a:p>
             <a:pPr algn="ctr"/>
+            <a:endParaRPr/>
           </a:p>
         </p:txBody>
       </p:sp>
@@ -11247,7 +12797,7 @@
         <p:spPr>
           <a:xfrm>
             <a:off x="8229600" y="1920240"/>
-            <a:ext cx="3200400" cy="274320"/>
+            <a:ext cx="3200400" cy="292388"/>
           </a:xfrm>
           <a:prstGeom prst="rect">
             <a:avLst/>
@@ -11269,8 +12819,26 @@
               </a:defRPr>
             </a:pPr>
             <a:r>
-              <a:t>① 明确前置依赖</a:t>
-            </a:r>
+              <a:rPr sz="1300" dirty="0">
+                <a:solidFill>
+                  <a:srgbClr val="FFC000"/>
+                </a:solidFill>
+              </a:rPr>
+              <a:t>① </a:t>
+            </a:r>
+            <a:r>
+              <a:rPr sz="1300" dirty="0" err="1">
+                <a:solidFill>
+                  <a:srgbClr val="FFC000"/>
+                </a:solidFill>
+              </a:rPr>
+              <a:t>明确前置依赖</a:t>
+            </a:r>
+            <a:endParaRPr sz="1300" dirty="0">
+              <a:solidFill>
+                <a:srgbClr val="FFC000"/>
+              </a:solidFill>
+            </a:endParaRPr>
           </a:p>
         </p:txBody>
       </p:sp>
@@ -11283,7 +12851,7 @@
         <p:spPr>
           <a:xfrm>
             <a:off x="8229600" y="2194560"/>
-            <a:ext cx="3200400" cy="457200"/>
+            <a:ext cx="3200400" cy="276999"/>
           </a:xfrm>
           <a:prstGeom prst="rect">
             <a:avLst/>
@@ -11305,8 +12873,22 @@
               </a:defRPr>
             </a:pPr>
             <a:r>
-              <a:t>"依赖Step 0和Step 1" → AI不会重复造轮子</a:t>
-            </a:r>
+              <a:rPr sz="1200" dirty="0"/>
+              <a:t>"</a:t>
+            </a:r>
+            <a:r>
+              <a:rPr sz="1200" dirty="0" err="1"/>
+              <a:t>依赖Step</a:t>
+            </a:r>
+            <a:r>
+              <a:rPr sz="1200" dirty="0"/>
+              <a:t> 0和Step 1" → </a:t>
+            </a:r>
+            <a:r>
+              <a:rPr sz="1200" dirty="0" err="1"/>
+              <a:t>AI不会重复造轮子</a:t>
+            </a:r>
+            <a:endParaRPr sz="1200" dirty="0"/>
           </a:p>
         </p:txBody>
       </p:sp>
@@ -11319,7 +12901,7 @@
         <p:spPr>
           <a:xfrm>
             <a:off x="8229600" y="2743200"/>
-            <a:ext cx="3200400" cy="274320"/>
+            <a:ext cx="3200400" cy="292388"/>
           </a:xfrm>
           <a:prstGeom prst="rect">
             <a:avLst/>
@@ -11341,8 +12923,26 @@
               </a:defRPr>
             </a:pPr>
             <a:r>
-              <a:t>② 分模块编号</a:t>
-            </a:r>
+              <a:rPr sz="1300" dirty="0">
+                <a:solidFill>
+                  <a:srgbClr val="FFC000"/>
+                </a:solidFill>
+              </a:rPr>
+              <a:t>② </a:t>
+            </a:r>
+            <a:r>
+              <a:rPr sz="1300" dirty="0" err="1">
+                <a:solidFill>
+                  <a:srgbClr val="FFC000"/>
+                </a:solidFill>
+              </a:rPr>
+              <a:t>分模块编号</a:t>
+            </a:r>
+            <a:endParaRPr sz="1300" dirty="0">
+              <a:solidFill>
+                <a:srgbClr val="FFC000"/>
+              </a:solidFill>
+            </a:endParaRPr>
           </a:p>
         </p:txBody>
       </p:sp>
@@ -11355,7 +12955,7 @@
         <p:spPr>
           <a:xfrm>
             <a:off x="8229600" y="3017520"/>
-            <a:ext cx="3200400" cy="457200"/>
+            <a:ext cx="3200400" cy="276999"/>
           </a:xfrm>
           <a:prstGeom prst="rect">
             <a:avLst/>
@@ -11377,8 +12977,14 @@
               </a:defRPr>
             </a:pPr>
             <a:r>
-              <a:t>6个子任务清晰独立 → AI不会遗漏</a:t>
-            </a:r>
+              <a:rPr sz="1200" dirty="0"/>
+              <a:t>6个子任务清晰独立 → </a:t>
+            </a:r>
+            <a:r>
+              <a:rPr sz="1200" dirty="0" err="1"/>
+              <a:t>AI不会遗漏</a:t>
+            </a:r>
+            <a:endParaRPr sz="1200" dirty="0"/>
           </a:p>
         </p:txBody>
       </p:sp>
@@ -11391,7 +12997,7 @@
         <p:spPr>
           <a:xfrm>
             <a:off x="8229600" y="3566160"/>
-            <a:ext cx="3200400" cy="274320"/>
+            <a:ext cx="3200400" cy="292388"/>
           </a:xfrm>
           <a:prstGeom prst="rect">
             <a:avLst/>
@@ -11413,8 +13019,26 @@
               </a:defRPr>
             </a:pPr>
             <a:r>
-              <a:t>③ 指定函数签名</a:t>
-            </a:r>
+              <a:rPr sz="1300" dirty="0">
+                <a:solidFill>
+                  <a:srgbClr val="FFC000"/>
+                </a:solidFill>
+              </a:rPr>
+              <a:t>③ </a:t>
+            </a:r>
+            <a:r>
+              <a:rPr sz="1300" dirty="0" err="1">
+                <a:solidFill>
+                  <a:srgbClr val="FFC000"/>
+                </a:solidFill>
+              </a:rPr>
+              <a:t>指定函数签名</a:t>
+            </a:r>
+            <a:endParaRPr sz="1300" dirty="0">
+              <a:solidFill>
+                <a:srgbClr val="FFC000"/>
+              </a:solidFill>
+            </a:endParaRPr>
           </a:p>
         </p:txBody>
       </p:sp>
@@ -11449,8 +13073,26 @@
               </a:defRPr>
             </a:pPr>
             <a:r>
-              <a:t>updateProgress(current,total) → 入参类型被约束</a:t>
-            </a:r>
+              <a:rPr sz="1200" dirty="0" err="1"/>
+              <a:t>updateProgress</a:t>
+            </a:r>
+            <a:r>
+              <a:rPr sz="1200" dirty="0"/>
+              <a:t>(</a:t>
+            </a:r>
+            <a:r>
+              <a:rPr sz="1200" dirty="0" err="1"/>
+              <a:t>current,total</a:t>
+            </a:r>
+            <a:r>
+              <a:rPr sz="1200" dirty="0"/>
+              <a:t>) → </a:t>
+            </a:r>
+            <a:r>
+              <a:rPr sz="1200" dirty="0" err="1"/>
+              <a:t>入参类型被约束</a:t>
+            </a:r>
+            <a:endParaRPr sz="1200" dirty="0"/>
           </a:p>
         </p:txBody>
       </p:sp>
@@ -11463,7 +13105,7 @@
         <p:spPr>
           <a:xfrm>
             <a:off x="8229600" y="4389120"/>
-            <a:ext cx="3200400" cy="274320"/>
+            <a:ext cx="3200400" cy="292388"/>
           </a:xfrm>
           <a:prstGeom prst="rect">
             <a:avLst/>
@@ -11485,8 +13127,26 @@
               </a:defRPr>
             </a:pPr>
             <a:r>
-              <a:t>④ 附完成标准</a:t>
-            </a:r>
+              <a:rPr sz="1300" dirty="0">
+                <a:solidFill>
+                  <a:srgbClr val="FFC000"/>
+                </a:solidFill>
+              </a:rPr>
+              <a:t>④ </a:t>
+            </a:r>
+            <a:r>
+              <a:rPr sz="1300" dirty="0" err="1">
+                <a:solidFill>
+                  <a:srgbClr val="FFC000"/>
+                </a:solidFill>
+              </a:rPr>
+              <a:t>附完成标准</a:t>
+            </a:r>
+            <a:endParaRPr sz="1300" dirty="0">
+              <a:solidFill>
+                <a:srgbClr val="FFC000"/>
+              </a:solidFill>
+            </a:endParaRPr>
           </a:p>
         </p:txBody>
       </p:sp>
@@ -11499,7 +13159,7 @@
         <p:spPr>
           <a:xfrm>
             <a:off x="8229600" y="4663440"/>
-            <a:ext cx="3200400" cy="457200"/>
+            <a:ext cx="3200400" cy="276999"/>
           </a:xfrm>
           <a:prstGeom prst="rect">
             <a:avLst/>
@@ -11521,8 +13181,18 @@
               </a:defRPr>
             </a:pPr>
             <a:r>
-              <a:t>验收条件可自我验证 → AI输出更精准</a:t>
-            </a:r>
+              <a:rPr sz="1200" dirty="0" err="1"/>
+              <a:t>验收条件可自我验证</a:t>
+            </a:r>
+            <a:r>
+              <a:rPr sz="1200" dirty="0"/>
+              <a:t> → </a:t>
+            </a:r>
+            <a:r>
+              <a:rPr sz="1200" dirty="0" err="1"/>
+              <a:t>AI输出更精准</a:t>
+            </a:r>
+            <a:endParaRPr sz="1200" dirty="0"/>
           </a:p>
         </p:txBody>
       </p:sp>
@@ -11535,7 +13205,7 @@
         <p:spPr>
           <a:xfrm>
             <a:off x="8229600" y="5212080"/>
-            <a:ext cx="3200400" cy="274320"/>
+            <a:ext cx="3200400" cy="292388"/>
           </a:xfrm>
           <a:prstGeom prst="rect">
             <a:avLst/>
@@ -11557,8 +13227,26 @@
               </a:defRPr>
             </a:pPr>
             <a:r>
-              <a:t>⑤ 上下文完整</a:t>
-            </a:r>
+              <a:rPr sz="1300" dirty="0">
+                <a:solidFill>
+                  <a:srgbClr val="FFC000"/>
+                </a:solidFill>
+              </a:rPr>
+              <a:t>⑤ </a:t>
+            </a:r>
+            <a:r>
+              <a:rPr sz="1300" dirty="0" err="1">
+                <a:solidFill>
+                  <a:srgbClr val="FFC000"/>
+                </a:solidFill>
+              </a:rPr>
+              <a:t>上下文完整</a:t>
+            </a:r>
+            <a:endParaRPr sz="1300" dirty="0">
+              <a:solidFill>
+                <a:srgbClr val="FFC000"/>
+              </a:solidFill>
+            </a:endParaRPr>
           </a:p>
         </p:txBody>
       </p:sp>
@@ -11571,7 +13259,7 @@
         <p:spPr>
           <a:xfrm>
             <a:off x="8229600" y="5486400"/>
-            <a:ext cx="3200400" cy="457200"/>
+            <a:ext cx="3200400" cy="276999"/>
           </a:xfrm>
           <a:prstGeom prst="rect">
             <a:avLst/>
@@ -11593,8 +13281,18 @@
               </a:defRPr>
             </a:pPr>
             <a:r>
-              <a:t>单次会话独立理解 → 不需要之前对话</a:t>
-            </a:r>
+              <a:rPr sz="1200" dirty="0" err="1"/>
+              <a:t>单次会话独立理解</a:t>
+            </a:r>
+            <a:r>
+              <a:rPr sz="1200" dirty="0"/>
+              <a:t> → </a:t>
+            </a:r>
+            <a:r>
+              <a:rPr sz="1200" dirty="0" err="1"/>
+              <a:t>不需要之前对话</a:t>
+            </a:r>
+            <a:endParaRPr sz="1200" dirty="0"/>
           </a:p>
         </p:txBody>
       </p:sp>
@@ -11639,11 +13337,23 @@
   <p:clrMapOvr>
     <a:masterClrMapping/>
   </p:clrMapOvr>
+  <mc:AlternateContent xmlns:mc="http://schemas.openxmlformats.org/markup-compatibility/2006">
+    <mc:Choice xmlns:p159="http://schemas.microsoft.com/office/powerpoint/2015/09/main" Requires="p159">
+      <p:transition xmlns:p14="http://schemas.microsoft.com/office/powerpoint/2010/main" spd="slow" p14:dur="2000">
+        <p159:morph option="byObject"/>
+      </p:transition>
+    </mc:Choice>
+    <mc:Fallback>
+      <p:transition spd="slow">
+        <p:fade/>
+      </p:transition>
+    </mc:Fallback>
+  </mc:AlternateContent>
 </p:sld>
 </file>
 
 <file path=ppt/slides/slide7.xml><?xml version="1.0" encoding="utf-8"?>
-<p:sld xmlns:a="http://schemas.openxmlformats.org/drawingml/2006/main" xmlns:p="http://schemas.openxmlformats.org/presentationml/2006/main" xmlns:r="http://schemas.openxmlformats.org/officeDocument/2006/relationships">
+<p:sld xmlns:a="http://schemas.openxmlformats.org/drawingml/2006/main" xmlns:r="http://schemas.openxmlformats.org/officeDocument/2006/relationships" xmlns:p="http://schemas.openxmlformats.org/presentationml/2006/main">
   <p:cSld>
     <p:bg>
       <p:bgPr>
@@ -11659,7 +13369,14 @@
         <p:cNvGrpSpPr/>
         <p:nvPr/>
       </p:nvGrpSpPr>
-      <p:grpSpPr/>
+      <p:grpSpPr>
+        <a:xfrm>
+          <a:off x="0" y="0"/>
+          <a:ext cx="0" cy="0"/>
+          <a:chOff x="0" y="0"/>
+          <a:chExt cx="0" cy="0"/>
+        </a:xfrm>
+      </p:grpSpPr>
       <p:sp>
         <p:nvSpPr>
           <p:cNvPr id="2" name="Rectangle 1"/>
@@ -11702,6 +13419,7 @@
           <a:lstStyle/>
           <a:p>
             <a:pPr algn="ctr"/>
+            <a:endParaRPr/>
           </a:p>
         </p:txBody>
       </p:sp>
@@ -11819,6 +13537,7 @@
           <a:lstStyle/>
           <a:p>
             <a:pPr algn="ctr"/>
+            <a:endParaRPr/>
           </a:p>
         </p:txBody>
       </p:sp>
@@ -11939,6 +13658,7 @@
                 <a:latin typeface="Microsoft YaHei"/>
               </a:defRPr>
             </a:pPr>
+            <a:endParaRPr/>
           </a:p>
           <a:p>
             <a:pPr>
@@ -11984,6 +13704,7 @@
                 <a:latin typeface="Microsoft YaHei"/>
               </a:defRPr>
             </a:pPr>
+            <a:endParaRPr/>
           </a:p>
           <a:p>
             <a:pPr>
@@ -12033,6 +13754,7 @@
                 <a:latin typeface="Microsoft YaHei"/>
               </a:defRPr>
             </a:pPr>
+            <a:endParaRPr/>
           </a:p>
           <a:p>
             <a:pPr>
@@ -12118,6 +13840,7 @@
           <a:lstStyle/>
           <a:p>
             <a:pPr algn="ctr"/>
+            <a:endParaRPr/>
           </a:p>
         </p:txBody>
       </p:sp>
@@ -12286,6 +14009,7 @@
                 <a:latin typeface="Microsoft YaHei"/>
               </a:defRPr>
             </a:pPr>
+            <a:endParaRPr/>
           </a:p>
           <a:p>
             <a:pPr>
@@ -12347,6 +14071,7 @@
                 <a:latin typeface="Microsoft YaHei"/>
               </a:defRPr>
             </a:pPr>
+            <a:endParaRPr/>
           </a:p>
           <a:p>
             <a:pPr>
@@ -12400,6 +14125,7 @@
                 <a:latin typeface="Microsoft YaHei"/>
               </a:defRPr>
             </a:pPr>
+            <a:endParaRPr/>
           </a:p>
           <a:p>
             <a:pPr>
@@ -12477,6 +14203,7 @@
           <a:lstStyle/>
           <a:p>
             <a:pPr algn="ctr"/>
+            <a:endParaRPr/>
           </a:p>
         </p:txBody>
       </p:sp>
@@ -12581,6 +14308,7 @@
                 <a:latin typeface="Microsoft YaHei"/>
               </a:defRPr>
             </a:pPr>
+            <a:endParaRPr/>
           </a:p>
           <a:p>
             <a:pPr>
@@ -12626,6 +14354,7 @@
                 <a:latin typeface="Microsoft YaHei"/>
               </a:defRPr>
             </a:pPr>
+            <a:endParaRPr/>
           </a:p>
           <a:p>
             <a:pPr>
@@ -12679,6 +14408,7 @@
                 <a:latin typeface="Microsoft YaHei"/>
               </a:defRPr>
             </a:pPr>
+            <a:endParaRPr/>
           </a:p>
           <a:p>
             <a:pPr>
@@ -12823,11 +14553,23 @@
   <p:clrMapOvr>
     <a:masterClrMapping/>
   </p:clrMapOvr>
+  <mc:AlternateContent xmlns:mc="http://schemas.openxmlformats.org/markup-compatibility/2006">
+    <mc:Choice xmlns:p159="http://schemas.microsoft.com/office/powerpoint/2015/09/main" Requires="p159">
+      <p:transition xmlns:p14="http://schemas.microsoft.com/office/powerpoint/2010/main" spd="slow" p14:dur="2000">
+        <p159:morph option="byObject"/>
+      </p:transition>
+    </mc:Choice>
+    <mc:Fallback>
+      <p:transition spd="slow">
+        <p:fade/>
+      </p:transition>
+    </mc:Fallback>
+  </mc:AlternateContent>
 </p:sld>
 </file>
 
 <file path=ppt/slides/slide8.xml><?xml version="1.0" encoding="utf-8"?>
-<p:sld xmlns:a="http://schemas.openxmlformats.org/drawingml/2006/main" xmlns:p="http://schemas.openxmlformats.org/presentationml/2006/main" xmlns:r="http://schemas.openxmlformats.org/officeDocument/2006/relationships">
+<p:sld xmlns:a="http://schemas.openxmlformats.org/drawingml/2006/main" xmlns:r="http://schemas.openxmlformats.org/officeDocument/2006/relationships" xmlns:p="http://schemas.openxmlformats.org/presentationml/2006/main">
   <p:cSld>
     <p:bg>
       <p:bgPr>
@@ -12843,7 +14585,14 @@
         <p:cNvGrpSpPr/>
         <p:nvPr/>
       </p:nvGrpSpPr>
-      <p:grpSpPr/>
+      <p:grpSpPr>
+        <a:xfrm>
+          <a:off x="0" y="0"/>
+          <a:ext cx="0" cy="0"/>
+          <a:chOff x="0" y="0"/>
+          <a:chExt cx="0" cy="0"/>
+        </a:xfrm>
+      </p:grpSpPr>
       <p:sp>
         <p:nvSpPr>
           <p:cNvPr id="2" name="Rectangle 1"/>
@@ -12886,6 +14635,7 @@
           <a:lstStyle/>
           <a:p>
             <a:pPr algn="ctr"/>
+            <a:endParaRPr/>
           </a:p>
         </p:txBody>
       </p:sp>
@@ -13003,6 +14753,7 @@
           <a:lstStyle/>
           <a:p>
             <a:pPr algn="ctr"/>
+            <a:endParaRPr/>
           </a:p>
         </p:txBody>
       </p:sp>
@@ -13014,7 +14765,7 @@
         </p:nvSpPr>
         <p:spPr>
           <a:xfrm>
-            <a:off x="822960" y="1417320"/>
+            <a:off x="822960" y="1389888"/>
             <a:ext cx="4572000" cy="365760"/>
           </a:xfrm>
           <a:prstGeom prst="rect">
@@ -13037,8 +14788,14 @@
               </a:defRPr>
             </a:pPr>
             <a:r>
-              <a:t>✅ 好的方面</a:t>
-            </a:r>
+              <a:rPr dirty="0"/>
+              <a:t>✅ </a:t>
+            </a:r>
+            <a:r>
+              <a:rPr dirty="0" err="1"/>
+              <a:t>好的方面</a:t>
+            </a:r>
+            <a:endParaRPr dirty="0"/>
           </a:p>
         </p:txBody>
       </p:sp>
@@ -13048,11 +14805,17 @@
           <p:cNvGraphicFramePr>
             <a:graphicFrameLocks noGrp="1"/>
           </p:cNvGraphicFramePr>
-          <p:nvPr/>
+          <p:nvPr>
+            <p:extLst>
+              <p:ext uri="{D42A27DB-BD31-4B8C-83A1-F6EECF244321}">
+                <p14:modId xmlns:p14="http://schemas.microsoft.com/office/powerpoint/2010/main" val="115523638"/>
+              </p:ext>
+            </p:extLst>
+          </p:nvPr>
         </p:nvGraphicFramePr>
         <p:xfrm>
-          <a:off x="822960" y="1828800"/>
-          <a:ext cx="4754880" cy="1828800"/>
+          <a:off x="822959" y="1755648"/>
+          <a:ext cx="4911721" cy="1828800"/>
         </p:xfrm>
         <a:graphic>
           <a:graphicData uri="http://schemas.openxmlformats.org/drawingml/2006/table">
@@ -13061,8 +14824,20 @@
                 <a:tableStyleId>{5C22544A-7EE6-4342-B048-85BDC9FD1C3A}</a:tableStyleId>
               </a:tblPr>
               <a:tblGrid>
-                <a:gridCol w="1097280"/>
-                <a:gridCol w="3657600"/>
+                <a:gridCol w="1264212">
+                  <a:extLst>
+                    <a:ext uri="{9D8B030D-6E8A-4147-A177-3AD203B41FA5}">
+                      <a16:colId xmlns:a16="http://schemas.microsoft.com/office/drawing/2014/main" val="20000"/>
+                    </a:ext>
+                  </a:extLst>
+                </a:gridCol>
+                <a:gridCol w="3647509">
+                  <a:extLst>
+                    <a:ext uri="{9D8B030D-6E8A-4147-A177-3AD203B41FA5}">
+                      <a16:colId xmlns:a16="http://schemas.microsoft.com/office/drawing/2014/main" val="20001"/>
+                    </a:ext>
+                  </a:extLst>
+                </a:gridCol>
               </a:tblGrid>
               <a:tr h="365760">
                 <a:tc>
@@ -13103,8 +14878,10 @@
                         </a:defRPr>
                       </a:pPr>
                       <a:r>
+                        <a:rPr dirty="0" err="1"/>
                         <a:t>说明</a:t>
                       </a:r>
+                      <a:endParaRPr dirty="0"/>
                     </a:p>
                   </a:txBody>
                   <a:tcPr>
@@ -13113,6 +14890,11 @@
                     </a:solidFill>
                   </a:tcPr>
                 </a:tc>
+                <a:extLst>
+                  <a:ext uri="{0D108BD9-81ED-4DB2-BD59-A6C34878D82A}">
+                    <a16:rowId xmlns:a16="http://schemas.microsoft.com/office/drawing/2014/main" val="10000"/>
+                  </a:ext>
+                </a:extLst>
               </a:tr>
               <a:tr h="365760">
                 <a:tc>
@@ -13163,6 +14945,11 @@
                     </a:solidFill>
                   </a:tcPr>
                 </a:tc>
+                <a:extLst>
+                  <a:ext uri="{0D108BD9-81ED-4DB2-BD59-A6C34878D82A}">
+                    <a16:rowId xmlns:a16="http://schemas.microsoft.com/office/drawing/2014/main" val="10001"/>
+                  </a:ext>
+                </a:extLst>
               </a:tr>
               <a:tr h="365760">
                 <a:tc>
@@ -13203,8 +14990,10 @@
                         </a:defRPr>
                       </a:pPr>
                       <a:r>
+                        <a:rPr dirty="0" err="1"/>
                         <a:t>AI严格按照开发计划的依赖关系执行，不跳过依赖</a:t>
                       </a:r>
+                      <a:endParaRPr dirty="0"/>
                     </a:p>
                   </a:txBody>
                   <a:tcPr>
@@ -13213,6 +15002,11 @@
                     </a:solidFill>
                   </a:tcPr>
                 </a:tc>
+                <a:extLst>
+                  <a:ext uri="{0D108BD9-81ED-4DB2-BD59-A6C34878D82A}">
+                    <a16:rowId xmlns:a16="http://schemas.microsoft.com/office/drawing/2014/main" val="10002"/>
+                  </a:ext>
+                </a:extLst>
               </a:tr>
               <a:tr h="365760">
                 <a:tc>
@@ -13263,6 +15057,11 @@
                     </a:solidFill>
                   </a:tcPr>
                 </a:tc>
+                <a:extLst>
+                  <a:ext uri="{0D108BD9-81ED-4DB2-BD59-A6C34878D82A}">
+                    <a16:rowId xmlns:a16="http://schemas.microsoft.com/office/drawing/2014/main" val="10003"/>
+                  </a:ext>
+                </a:extLst>
               </a:tr>
               <a:tr h="365760">
                 <a:tc>
@@ -13303,8 +15102,18 @@
                         </a:defRPr>
                       </a:pPr>
                       <a:r>
-                        <a:t>从render.yaml到PythonAnywhere API上传文件</a:t>
-                      </a:r>
+                        <a:rPr dirty="0" err="1"/>
+                        <a:t>从render.yaml到PythonAnywhere</a:t>
+                      </a:r>
+                      <a:r>
+                        <a:rPr dirty="0"/>
+                        <a:t> </a:t>
+                      </a:r>
+                      <a:r>
+                        <a:rPr dirty="0" err="1"/>
+                        <a:t>API上传文件</a:t>
+                      </a:r>
+                      <a:endParaRPr dirty="0"/>
                     </a:p>
                   </a:txBody>
                   <a:tcPr>
@@ -13313,6 +15122,11 @@
                     </a:solidFill>
                   </a:tcPr>
                 </a:tc>
+                <a:extLst>
+                  <a:ext uri="{0D108BD9-81ED-4DB2-BD59-A6C34878D82A}">
+                    <a16:rowId xmlns:a16="http://schemas.microsoft.com/office/drawing/2014/main" val="10004"/>
+                  </a:ext>
+                </a:extLst>
               </a:tr>
             </a:tbl>
           </a:graphicData>
@@ -13360,6 +15174,7 @@
           <a:lstStyle/>
           <a:p>
             <a:pPr algn="ctr"/>
+            <a:endParaRPr/>
           </a:p>
         </p:txBody>
       </p:sp>
@@ -13371,7 +15186,7 @@
         </p:nvSpPr>
         <p:spPr>
           <a:xfrm>
-            <a:off x="6583680" y="1417320"/>
+            <a:off x="6583680" y="1389888"/>
             <a:ext cx="4572000" cy="365760"/>
           </a:xfrm>
           <a:prstGeom prst="rect">
@@ -13394,8 +15209,14 @@
               </a:defRPr>
             </a:pPr>
             <a:r>
-              <a:t>⚠️ 需要改进</a:t>
-            </a:r>
+              <a:rPr dirty="0"/>
+              <a:t>⚠️ </a:t>
+            </a:r>
+            <a:r>
+              <a:rPr dirty="0" err="1"/>
+              <a:t>需要改进</a:t>
+            </a:r>
+            <a:endParaRPr dirty="0"/>
           </a:p>
         </p:txBody>
       </p:sp>
@@ -13405,11 +15226,17 @@
           <p:cNvGraphicFramePr>
             <a:graphicFrameLocks noGrp="1"/>
           </p:cNvGraphicFramePr>
-          <p:nvPr/>
+          <p:nvPr>
+            <p:extLst>
+              <p:ext uri="{D42A27DB-BD31-4B8C-83A1-F6EECF244321}">
+                <p14:modId xmlns:p14="http://schemas.microsoft.com/office/powerpoint/2010/main" val="636870246"/>
+              </p:ext>
+            </p:extLst>
+          </p:nvPr>
         </p:nvGraphicFramePr>
         <p:xfrm>
-          <a:off x="6583680" y="1828800"/>
-          <a:ext cx="4754880" cy="1828800"/>
+          <a:off x="6614160" y="1737360"/>
+          <a:ext cx="4907280" cy="1828800"/>
         </p:xfrm>
         <a:graphic>
           <a:graphicData uri="http://schemas.openxmlformats.org/drawingml/2006/table">
@@ -13418,8 +15245,20 @@
                 <a:tableStyleId>{5C22544A-7EE6-4342-B048-85BDC9FD1C3A}</a:tableStyleId>
               </a:tblPr>
               <a:tblGrid>
-                <a:gridCol w="1097280"/>
-                <a:gridCol w="3657600"/>
+                <a:gridCol w="1242236">
+                  <a:extLst>
+                    <a:ext uri="{9D8B030D-6E8A-4147-A177-3AD203B41FA5}">
+                      <a16:colId xmlns:a16="http://schemas.microsoft.com/office/drawing/2014/main" val="20000"/>
+                    </a:ext>
+                  </a:extLst>
+                </a:gridCol>
+                <a:gridCol w="3665044">
+                  <a:extLst>
+                    <a:ext uri="{9D8B030D-6E8A-4147-A177-3AD203B41FA5}">
+                      <a16:colId xmlns:a16="http://schemas.microsoft.com/office/drawing/2014/main" val="20001"/>
+                    </a:ext>
+                  </a:extLst>
+                </a:gridCol>
               </a:tblGrid>
               <a:tr h="365760">
                 <a:tc>
@@ -13470,6 +15309,11 @@
                     </a:solidFill>
                   </a:tcPr>
                 </a:tc>
+                <a:extLst>
+                  <a:ext uri="{0D108BD9-81ED-4DB2-BD59-A6C34878D82A}">
+                    <a16:rowId xmlns:a16="http://schemas.microsoft.com/office/drawing/2014/main" val="10000"/>
+                  </a:ext>
+                </a:extLst>
               </a:tr>
               <a:tr h="365760">
                 <a:tc>
@@ -13520,6 +15364,11 @@
                     </a:solidFill>
                   </a:tcPr>
                 </a:tc>
+                <a:extLst>
+                  <a:ext uri="{0D108BD9-81ED-4DB2-BD59-A6C34878D82A}">
+                    <a16:rowId xmlns:a16="http://schemas.microsoft.com/office/drawing/2014/main" val="10001"/>
+                  </a:ext>
+                </a:extLst>
               </a:tr>
               <a:tr h="365760">
                 <a:tc>
@@ -13560,8 +15409,10 @@
                         </a:defRPr>
                       </a:pPr>
                       <a:r>
+                        <a:rPr dirty="0" err="1"/>
                         <a:t>AI无法自动打开浏览器测试，验证全靠人工</a:t>
                       </a:r>
+                      <a:endParaRPr dirty="0"/>
                     </a:p>
                   </a:txBody>
                   <a:tcPr>
@@ -13570,6 +15421,11 @@
                     </a:solidFill>
                   </a:tcPr>
                 </a:tc>
+                <a:extLst>
+                  <a:ext uri="{0D108BD9-81ED-4DB2-BD59-A6C34878D82A}">
+                    <a16:rowId xmlns:a16="http://schemas.microsoft.com/office/drawing/2014/main" val="10002"/>
+                  </a:ext>
+                </a:extLst>
               </a:tr>
               <a:tr h="365760">
                 <a:tc>
@@ -13620,6 +15476,11 @@
                     </a:solidFill>
                   </a:tcPr>
                 </a:tc>
+                <a:extLst>
+                  <a:ext uri="{0D108BD9-81ED-4DB2-BD59-A6C34878D82A}">
+                    <a16:rowId xmlns:a16="http://schemas.microsoft.com/office/drawing/2014/main" val="10003"/>
+                  </a:ext>
+                </a:extLst>
               </a:tr>
               <a:tr h="365760">
                 <a:tc>
@@ -13660,8 +15521,18 @@
                         </a:defRPr>
                       </a:pPr>
                       <a:r>
-                        <a:t>认证/加密代码需人工确认逻辑正确性</a:t>
-                      </a:r>
+                        <a:rPr dirty="0" err="1"/>
+                        <a:t>认证</a:t>
+                      </a:r>
+                      <a:r>
+                        <a:rPr dirty="0"/>
+                        <a:t>/</a:t>
+                      </a:r>
+                      <a:r>
+                        <a:rPr dirty="0" err="1"/>
+                        <a:t>加密代码需人工确认逻辑正确性</a:t>
+                      </a:r>
+                      <a:endParaRPr dirty="0"/>
                     </a:p>
                   </a:txBody>
                   <a:tcPr>
@@ -13670,6 +15541,11 @@
                     </a:solidFill>
                   </a:tcPr>
                 </a:tc>
+                <a:extLst>
+                  <a:ext uri="{0D108BD9-81ED-4DB2-BD59-A6C34878D82A}">
+                    <a16:rowId xmlns:a16="http://schemas.microsoft.com/office/drawing/2014/main" val="10004"/>
+                  </a:ext>
+                </a:extLst>
               </a:tr>
             </a:tbl>
           </a:graphicData>
@@ -13717,6 +15593,7 @@
           <a:lstStyle/>
           <a:p>
             <a:pPr algn="ctr"/>
+            <a:endParaRPr/>
           </a:p>
         </p:txBody>
       </p:sp>
@@ -13764,7 +15641,7 @@
         </p:nvSpPr>
         <p:spPr>
           <a:xfrm>
-            <a:off x="822960" y="4709160"/>
+            <a:off x="822960" y="4617720"/>
             <a:ext cx="10515600" cy="1463040"/>
           </a:xfrm>
           <a:prstGeom prst="rect">
@@ -13790,7 +15667,24 @@
               </a:defRPr>
             </a:pPr>
             <a:r>
-              <a:t>Vibe Coding ≠ 不思考。恰恰相反，它要求更强的「架构思维」和「Prompt 设计能力」。</a:t>
+              <a:rPr dirty="0"/>
+              <a:t>Vibe Coding ≠ </a:t>
+            </a:r>
+            <a:r>
+              <a:rPr dirty="0" err="1"/>
+              <a:t>不思考。恰恰相反，它要求更强的「架构思维」和「Prompt</a:t>
+            </a:r>
+            <a:r>
+              <a:rPr dirty="0"/>
+              <a:t> </a:t>
+            </a:r>
+            <a:r>
+              <a:rPr dirty="0" err="1"/>
+              <a:t>设计能力</a:t>
+            </a:r>
+            <a:r>
+              <a:rPr dirty="0"/>
+              <a:t>」。</a:t>
             </a:r>
           </a:p>
           <a:p>
@@ -13805,6 +15699,7 @@
                 <a:latin typeface="Microsoft YaHei"/>
               </a:defRPr>
             </a:pPr>
+            <a:endParaRPr dirty="0"/>
           </a:p>
           <a:p>
             <a:pPr>
@@ -13819,7 +15714,12 @@
               </a:defRPr>
             </a:pPr>
             <a:r>
-              <a:t>你不需要写代码，但你必须：</a:t>
+              <a:rPr dirty="0" err="1"/>
+              <a:t>你不需要写代码，但你必须</a:t>
+            </a:r>
+            <a:r>
+              <a:rPr dirty="0"/>
+              <a:t>：</a:t>
             </a:r>
           </a:p>
           <a:p>
@@ -13835,7 +15735,16 @@
               </a:defRPr>
             </a:pPr>
             <a:r>
-              <a:t>  1. 把大问题拆成小步骤（分模块、分步骤）→ 开发计划.md 就是12个AI能消化的粒度</a:t>
+              <a:rPr dirty="0"/>
+              <a:t>  1. </a:t>
+            </a:r>
+            <a:r>
+              <a:rPr dirty="0" err="1"/>
+              <a:t>把大问题拆成小步骤（分模块、分步骤</a:t>
+            </a:r>
+            <a:r>
+              <a:rPr dirty="0"/>
+              <a:t>）→ 开发计划.md 就是12个AI能消化的粒度</a:t>
             </a:r>
           </a:p>
           <a:p>
@@ -13851,8 +15760,22 @@
               </a:defRPr>
             </a:pPr>
             <a:r>
-              <a:t>  2. 每一步清晰定义输入、输出、边界条件 → 每步的"目标+涉及文件+完成标准"格式</a:t>
-            </a:r>
+              <a:rPr dirty="0"/>
+              <a:t>  2. </a:t>
+            </a:r>
+            <a:r>
+              <a:rPr dirty="0" err="1"/>
+              <a:t>每一步清晰定义输入、输出、边界条件</a:t>
+            </a:r>
+            <a:r>
+              <a:rPr dirty="0"/>
+              <a:t> → </a:t>
+            </a:r>
+            <a:r>
+              <a:rPr dirty="0" err="1"/>
+              <a:t>每步的"目标+涉及文件+完成标准"格式</a:t>
+            </a:r>
+            <a:endParaRPr dirty="0"/>
           </a:p>
           <a:p>
             <a:pPr>
@@ -13867,8 +15790,22 @@
               </a:defRPr>
             </a:pPr>
             <a:r>
-              <a:t>  3. 亲自验证每一步的输出是否正确 → 启动→登录→打分→部署，全流程人工测试</a:t>
-            </a:r>
+              <a:rPr dirty="0"/>
+              <a:t>  3. </a:t>
+            </a:r>
+            <a:r>
+              <a:rPr dirty="0" err="1"/>
+              <a:t>亲自验证每一步的输出是否正确</a:t>
+            </a:r>
+            <a:r>
+              <a:rPr dirty="0"/>
+              <a:t> → </a:t>
+            </a:r>
+            <a:r>
+              <a:rPr dirty="0" err="1"/>
+              <a:t>启动→登录→打分→部署，全流程人工测试</a:t>
+            </a:r>
+            <a:endParaRPr dirty="0"/>
           </a:p>
           <a:p>
             <a:pPr>
@@ -13883,8 +15820,30 @@
               </a:defRPr>
             </a:pPr>
             <a:r>
-              <a:t>  4. 对最终代码负 100% 责任 → "AI写错了"不是报错理由，你必须找到错误并修好它</a:t>
-            </a:r>
+              <a:rPr dirty="0"/>
+              <a:t>  4. </a:t>
+            </a:r>
+            <a:r>
+              <a:rPr dirty="0" err="1"/>
+              <a:t>对最终代码负</a:t>
+            </a:r>
+            <a:r>
+              <a:rPr dirty="0"/>
+              <a:t> 100% </a:t>
+            </a:r>
+            <a:r>
+              <a:rPr dirty="0" err="1"/>
+              <a:t>责任</a:t>
+            </a:r>
+            <a:r>
+              <a:rPr dirty="0"/>
+              <a:t> → "</a:t>
+            </a:r>
+            <a:r>
+              <a:rPr dirty="0" err="1"/>
+              <a:t>AI写错了"不是报错理由，你必须找到错误并修好它</a:t>
+            </a:r>
+            <a:endParaRPr dirty="0"/>
           </a:p>
         </p:txBody>
       </p:sp>
@@ -13929,11 +15888,23 @@
   <p:clrMapOvr>
     <a:masterClrMapping/>
   </p:clrMapOvr>
+  <mc:AlternateContent xmlns:mc="http://schemas.openxmlformats.org/markup-compatibility/2006">
+    <mc:Choice xmlns:p159="http://schemas.microsoft.com/office/powerpoint/2015/09/main" Requires="p159">
+      <p:transition xmlns:p14="http://schemas.microsoft.com/office/powerpoint/2010/main" spd="slow" p14:dur="2000">
+        <p159:morph option="byObject"/>
+      </p:transition>
+    </mc:Choice>
+    <mc:Fallback>
+      <p:transition spd="slow">
+        <p:fade/>
+      </p:transition>
+    </mc:Fallback>
+  </mc:AlternateContent>
 </p:sld>
 </file>
 
 <file path=ppt/slides/slide9.xml><?xml version="1.0" encoding="utf-8"?>
-<p:sld xmlns:a="http://schemas.openxmlformats.org/drawingml/2006/main" xmlns:p="http://schemas.openxmlformats.org/presentationml/2006/main" xmlns:r="http://schemas.openxmlformats.org/officeDocument/2006/relationships">
+<p:sld xmlns:a="http://schemas.openxmlformats.org/drawingml/2006/main" xmlns:r="http://schemas.openxmlformats.org/officeDocument/2006/relationships" xmlns:p="http://schemas.openxmlformats.org/presentationml/2006/main">
   <p:cSld>
     <p:bg>
       <p:bgPr>
@@ -13949,7 +15920,14 @@
         <p:cNvGrpSpPr/>
         <p:nvPr/>
       </p:nvGrpSpPr>
-      <p:grpSpPr/>
+      <p:grpSpPr>
+        <a:xfrm>
+          <a:off x="0" y="0"/>
+          <a:ext cx="0" cy="0"/>
+          <a:chOff x="0" y="0"/>
+          <a:chExt cx="0" cy="0"/>
+        </a:xfrm>
+      </p:grpSpPr>
       <p:sp>
         <p:nvSpPr>
           <p:cNvPr id="2" name="Rectangle 1"/>
@@ -13992,6 +15970,7 @@
           <a:lstStyle/>
           <a:p>
             <a:pPr algn="ctr"/>
+            <a:endParaRPr/>
           </a:p>
         </p:txBody>
       </p:sp>
@@ -14109,42 +16088,7 @@
           <a:lstStyle/>
           <a:p>
             <a:pPr algn="ctr"/>
-          </a:p>
-        </p:txBody>
-      </p:sp>
-      <p:sp>
-        <p:nvSpPr>
-          <p:cNvPr id="6" name="TextBox 5"/>
-          <p:cNvSpPr txBox="1"/>
-          <p:nvPr/>
-        </p:nvSpPr>
-        <p:spPr>
-          <a:xfrm>
-            <a:off x="822960" y="1417320"/>
-            <a:ext cx="4572000" cy="365760"/>
-          </a:xfrm>
-          <a:prstGeom prst="rect">
-            <a:avLst/>
-          </a:prstGeom>
-          <a:noFill/>
-        </p:spPr>
-        <p:txBody>
-          <a:bodyPr wrap="square">
-            <a:spAutoFit/>
-          </a:bodyPr>
-          <a:lstStyle/>
-          <a:p>
-            <a:pPr algn="l">
-              <a:defRPr sz="1600" b="1">
-                <a:solidFill>
-                  <a:srgbClr val="1A1A1A"/>
-                </a:solidFill>
-                <a:latin typeface="Microsoft YaHei"/>
-              </a:defRPr>
-            </a:pPr>
-            <a:r>
-              <a:t>5步规划流程</a:t>
-            </a:r>
+            <a:endParaRPr/>
           </a:p>
         </p:txBody>
       </p:sp>
@@ -14154,11 +16098,17 @@
           <p:cNvGraphicFramePr>
             <a:graphicFrameLocks noGrp="1"/>
           </p:cNvGraphicFramePr>
-          <p:nvPr/>
+          <p:nvPr>
+            <p:extLst>
+              <p:ext uri="{D42A27DB-BD31-4B8C-83A1-F6EECF244321}">
+                <p14:modId xmlns:p14="http://schemas.microsoft.com/office/powerpoint/2010/main" val="1388637808"/>
+              </p:ext>
+            </p:extLst>
+          </p:nvPr>
         </p:nvGraphicFramePr>
         <p:xfrm>
-          <a:off x="822960" y="1828800"/>
-          <a:ext cx="10515600" cy="1280160"/>
+          <a:off x="839007" y="1326323"/>
+          <a:ext cx="10515600" cy="1722120"/>
         </p:xfrm>
         <a:graphic>
           <a:graphicData uri="http://schemas.openxmlformats.org/drawingml/2006/table">
@@ -14167,10 +16117,34 @@
                 <a:tableStyleId>{5C22544A-7EE6-4342-B048-85BDC9FD1C3A}</a:tableStyleId>
               </a:tblPr>
               <a:tblGrid>
-                <a:gridCol w="457200"/>
-                <a:gridCol w="2286000"/>
-                <a:gridCol w="4114800"/>
-                <a:gridCol w="3657600"/>
+                <a:gridCol w="457200">
+                  <a:extLst>
+                    <a:ext uri="{9D8B030D-6E8A-4147-A177-3AD203B41FA5}">
+                      <a16:colId xmlns:a16="http://schemas.microsoft.com/office/drawing/2014/main" val="20000"/>
+                    </a:ext>
+                  </a:extLst>
+                </a:gridCol>
+                <a:gridCol w="2286000">
+                  <a:extLst>
+                    <a:ext uri="{9D8B030D-6E8A-4147-A177-3AD203B41FA5}">
+                      <a16:colId xmlns:a16="http://schemas.microsoft.com/office/drawing/2014/main" val="20001"/>
+                    </a:ext>
+                  </a:extLst>
+                </a:gridCol>
+                <a:gridCol w="4114800">
+                  <a:extLst>
+                    <a:ext uri="{9D8B030D-6E8A-4147-A177-3AD203B41FA5}">
+                      <a16:colId xmlns:a16="http://schemas.microsoft.com/office/drawing/2014/main" val="20002"/>
+                    </a:ext>
+                  </a:extLst>
+                </a:gridCol>
+                <a:gridCol w="3657600">
+                  <a:extLst>
+                    <a:ext uri="{9D8B030D-6E8A-4147-A177-3AD203B41FA5}">
+                      <a16:colId xmlns:a16="http://schemas.microsoft.com/office/drawing/2014/main" val="20003"/>
+                    </a:ext>
+                  </a:extLst>
+                </a:gridCol>
               </a:tblGrid>
               <a:tr h="213360">
                 <a:tc>
@@ -14211,8 +16185,10 @@
                         </a:defRPr>
                       </a:pPr>
                       <a:r>
+                        <a:rPr dirty="0" err="1"/>
                         <a:t>产出物</a:t>
                       </a:r>
+                      <a:endParaRPr dirty="0"/>
                     </a:p>
                   </a:txBody>
                   <a:tcPr>
@@ -14235,8 +16211,10 @@
                         </a:defRPr>
                       </a:pPr>
                       <a:r>
+                        <a:rPr dirty="0" err="1"/>
                         <a:t>AI做了什么</a:t>
                       </a:r>
+                      <a:endParaRPr dirty="0"/>
                     </a:p>
                   </a:txBody>
                   <a:tcPr>
@@ -14269,6 +16247,11 @@
                     </a:solidFill>
                   </a:tcPr>
                 </a:tc>
+                <a:extLst>
+                  <a:ext uri="{0D108BD9-81ED-4DB2-BD59-A6C34878D82A}">
+                    <a16:rowId xmlns:a16="http://schemas.microsoft.com/office/drawing/2014/main" val="10000"/>
+                  </a:ext>
+                </a:extLst>
               </a:tr>
               <a:tr h="213360">
                 <a:tc>
@@ -14367,6 +16350,11 @@
                     </a:solidFill>
                   </a:tcPr>
                 </a:tc>
+                <a:extLst>
+                  <a:ext uri="{0D108BD9-81ED-4DB2-BD59-A6C34878D82A}">
+                    <a16:rowId xmlns:a16="http://schemas.microsoft.com/office/drawing/2014/main" val="10001"/>
+                  </a:ext>
+                </a:extLst>
               </a:tr>
               <a:tr h="213360">
                 <a:tc>
@@ -14465,6 +16453,11 @@
                     </a:solidFill>
                   </a:tcPr>
                 </a:tc>
+                <a:extLst>
+                  <a:ext uri="{0D108BD9-81ED-4DB2-BD59-A6C34878D82A}">
+                    <a16:rowId xmlns:a16="http://schemas.microsoft.com/office/drawing/2014/main" val="10002"/>
+                  </a:ext>
+                </a:extLst>
               </a:tr>
               <a:tr h="213360">
                 <a:tc>
@@ -14563,6 +16556,11 @@
                     </a:solidFill>
                   </a:tcPr>
                 </a:tc>
+                <a:extLst>
+                  <a:ext uri="{0D108BD9-81ED-4DB2-BD59-A6C34878D82A}">
+                    <a16:rowId xmlns:a16="http://schemas.microsoft.com/office/drawing/2014/main" val="10003"/>
+                  </a:ext>
+                </a:extLst>
               </a:tr>
               <a:tr h="213360">
                 <a:tc>
@@ -14661,6 +16659,11 @@
                     </a:solidFill>
                   </a:tcPr>
                 </a:tc>
+                <a:extLst>
+                  <a:ext uri="{0D108BD9-81ED-4DB2-BD59-A6C34878D82A}">
+                    <a16:rowId xmlns:a16="http://schemas.microsoft.com/office/drawing/2014/main" val="10004"/>
+                  </a:ext>
+                </a:extLst>
               </a:tr>
               <a:tr h="213360">
                 <a:tc>
@@ -14749,8 +16752,10 @@
                         </a:defRPr>
                       </a:pPr>
                       <a:r>
+                        <a:rPr dirty="0" err="1"/>
                         <a:t>确认规范一致性</a:t>
                       </a:r>
+                      <a:endParaRPr dirty="0"/>
                     </a:p>
                   </a:txBody>
                   <a:tcPr>
@@ -14759,6 +16764,11 @@
                     </a:solidFill>
                   </a:tcPr>
                 </a:tc>
+                <a:extLst>
+                  <a:ext uri="{0D108BD9-81ED-4DB2-BD59-A6C34878D82A}">
+                    <a16:rowId xmlns:a16="http://schemas.microsoft.com/office/drawing/2014/main" val="10005"/>
+                  </a:ext>
+                </a:extLst>
               </a:tr>
             </a:tbl>
           </a:graphicData>
@@ -14806,6 +16816,7 @@
           <a:lstStyle/>
           <a:p>
             <a:pPr algn="ctr"/>
+            <a:endParaRPr/>
           </a:p>
         </p:txBody>
       </p:sp>
@@ -14894,6 +16905,7 @@
                 <a:latin typeface="Microsoft YaHei"/>
               </a:defRPr>
             </a:pPr>
+            <a:endParaRPr/>
           </a:p>
           <a:p>
             <a:pPr>
@@ -14971,6 +16983,7 @@
                 <a:latin typeface="Microsoft YaHei"/>
               </a:defRPr>
             </a:pPr>
+            <a:endParaRPr/>
           </a:p>
           <a:p>
             <a:pPr>
@@ -15032,6 +17045,7 @@
           <a:lstStyle/>
           <a:p>
             <a:pPr algn="ctr"/>
+            <a:endParaRPr/>
           </a:p>
         </p:txBody>
       </p:sp>
@@ -15120,6 +17134,7 @@
                 <a:latin typeface="Microsoft YaHei"/>
               </a:defRPr>
             </a:pPr>
+            <a:endParaRPr/>
           </a:p>
           <a:p>
             <a:pPr>
@@ -15149,6 +17164,7 @@
                 <a:latin typeface="Microsoft YaHei"/>
               </a:defRPr>
             </a:pPr>
+            <a:endParaRPr/>
           </a:p>
           <a:p>
             <a:pPr>
@@ -15194,6 +17210,7 @@
                 <a:latin typeface="Microsoft YaHei"/>
               </a:defRPr>
             </a:pPr>
+            <a:endParaRPr/>
           </a:p>
           <a:p>
             <a:pPr>
@@ -15249,11 +17266,60 @@
           </a:p>
         </p:txBody>
       </p:sp>
+      <p:sp>
+        <p:nvSpPr>
+          <p:cNvPr id="6" name="TextBox 5"/>
+          <p:cNvSpPr txBox="1"/>
+          <p:nvPr/>
+        </p:nvSpPr>
+        <p:spPr>
+          <a:xfrm>
+            <a:off x="4060601" y="628846"/>
+            <a:ext cx="4572000" cy="365760"/>
+          </a:xfrm>
+          <a:prstGeom prst="rect">
+            <a:avLst/>
+          </a:prstGeom>
+          <a:noFill/>
+        </p:spPr>
+        <p:txBody>
+          <a:bodyPr wrap="square">
+            <a:spAutoFit/>
+          </a:bodyPr>
+          <a:lstStyle/>
+          <a:p>
+            <a:pPr algn="l">
+              <a:defRPr sz="1600" b="1">
+                <a:solidFill>
+                  <a:srgbClr val="1A1A1A"/>
+                </a:solidFill>
+                <a:latin typeface="Microsoft YaHei"/>
+              </a:defRPr>
+            </a:pPr>
+            <a:r>
+              <a:rPr dirty="0"/>
+              <a:t>5步规划流程</a:t>
+            </a:r>
+          </a:p>
+        </p:txBody>
+      </p:sp>
     </p:spTree>
   </p:cSld>
   <p:clrMapOvr>
     <a:masterClrMapping/>
   </p:clrMapOvr>
+  <mc:AlternateContent xmlns:mc="http://schemas.openxmlformats.org/markup-compatibility/2006">
+    <mc:Choice xmlns:p159="http://schemas.microsoft.com/office/powerpoint/2015/09/main" Requires="p159">
+      <p:transition xmlns:p14="http://schemas.microsoft.com/office/powerpoint/2010/main" spd="slow" p14:dur="2000">
+        <p159:morph option="byObject"/>
+      </p:transition>
+    </mc:Choice>
+    <mc:Fallback>
+      <p:transition spd="slow">
+        <p:fade/>
+      </p:transition>
+    </mc:Fallback>
+  </mc:AlternateContent>
 </p:sld>
 </file>
 
